--- a/物理演算を制作する中で.pptx
+++ b/物理演算を制作する中で.pptx
@@ -8,7 +8,7 @@
     <p:sldId id="256" r:id="rId2"/>
     <p:sldId id="257" r:id="rId3"/>
     <p:sldId id="261" r:id="rId4"/>
-    <p:sldId id="262" r:id="rId5"/>
+    <p:sldId id="263" r:id="rId5"/>
   </p:sldIdLst>
   <p:sldSz cx="12192000" cy="6858000"/>
   <p:notesSz cx="6858000" cy="9144000"/>
@@ -107,7 +107,48 @@
       </a:defRPr>
     </a:lvl9pPr>
   </p:defaultTextStyle>
+  <p:extLst>
+    <p:ext uri="{EFAFB233-063F-42B5-8137-9DF3F51BA10A}">
+      <p15:sldGuideLst xmlns:p15="http://schemas.microsoft.com/office/powerpoint/2012/main"/>
+    </p:ext>
+  </p:extLst>
 </p:presentation>
+</file>
+
+<file path=ppt/revisionInfo.xml><?xml version="1.0" encoding="utf-8"?>
+<p1510:revInfo xmlns:a="http://schemas.openxmlformats.org/drawingml/2006/main" xmlns:r="http://schemas.openxmlformats.org/officeDocument/2006/relationships" xmlns:p1510="http://schemas.microsoft.com/office/powerpoint/2015/10/main">
+  <p1510:revLst>
+    <p1510:client id="{1C723064-424B-4799-2A33-F71D2F537E81}" v="3" dt="2026-01-30T13:38:55.278"/>
+  </p1510:revLst>
+</p1510:revInfo>
+</file>
+
+<file path=ppt/changesInfos/changesInfo1.xml><?xml version="1.0" encoding="utf-8"?>
+<pc:chgInfo xmlns:a="http://schemas.openxmlformats.org/drawingml/2006/main" xmlns:r="http://schemas.openxmlformats.org/officeDocument/2006/relationships" xmlns:ac="http://schemas.microsoft.com/office/drawing/2013/main/command" xmlns:pc="http://schemas.microsoft.com/office/powerpoint/2013/main/command">
+  <pc:docChgLst>
+    <pc:chgData name="元藤　唯斗" userId="S::h1202419001@hiratagakuen.onmicrosoft.com::130faf52-781d-4de8-b826-0b85c634ce9b" providerId="AD" clId="Web-{1C723064-424B-4799-2A33-F71D2F537E81}"/>
+    <pc:docChg chg="addSld delSld">
+      <pc:chgData name="元藤　唯斗" userId="S::h1202419001@hiratagakuen.onmicrosoft.com::130faf52-781d-4de8-b826-0b85c634ce9b" providerId="AD" clId="Web-{1C723064-424B-4799-2A33-F71D2F537E81}" dt="2026-01-30T13:38:55.278" v="2"/>
+      <pc:docMkLst>
+        <pc:docMk/>
+      </pc:docMkLst>
+      <pc:sldChg chg="new del">
+        <pc:chgData name="元藤　唯斗" userId="S::h1202419001@hiratagakuen.onmicrosoft.com::130faf52-781d-4de8-b826-0b85c634ce9b" providerId="AD" clId="Web-{1C723064-424B-4799-2A33-F71D2F537E81}" dt="2026-01-30T13:38:50.918" v="1"/>
+        <pc:sldMkLst>
+          <pc:docMk/>
+          <pc:sldMk cId="2373107543" sldId="263"/>
+        </pc:sldMkLst>
+      </pc:sldChg>
+      <pc:sldChg chg="add replId">
+        <pc:chgData name="元藤　唯斗" userId="S::h1202419001@hiratagakuen.onmicrosoft.com::130faf52-781d-4de8-b826-0b85c634ce9b" providerId="AD" clId="Web-{1C723064-424B-4799-2A33-F71D2F537E81}" dt="2026-01-30T13:38:55.278" v="2"/>
+        <pc:sldMkLst>
+          <pc:docMk/>
+          <pc:sldMk cId="2760097806" sldId="263"/>
+        </pc:sldMkLst>
+      </pc:sldChg>
+    </pc:docChg>
+  </pc:docChgLst>
+</pc:chgInfo>
 </file>
 
 <file path=ppt/slideLayouts/slideLayout1.xml><?xml version="1.0" encoding="utf-8"?>
@@ -152,10 +193,9 @@
           </a:lstStyle>
           <a:p>
             <a:r>
-              <a:rPr kumimoji="1" lang="ja-JP" altLang="en-US" smtClean="0"/>
+              <a:rPr kumimoji="1" lang="ja-JP" altLang="en-US"/>
               <a:t>マスター タイトルの書式設定</a:t>
             </a:r>
-            <a:endParaRPr kumimoji="1" lang="ja-JP" altLang="en-US"/>
           </a:p>
         </p:txBody>
       </p:sp>
@@ -217,10 +257,9 @@
           </a:lstStyle>
           <a:p>
             <a:r>
-              <a:rPr kumimoji="1" lang="ja-JP" altLang="en-US" smtClean="0"/>
+              <a:rPr kumimoji="1" lang="ja-JP" altLang="en-US"/>
               <a:t>マスター サブタイトルの書式設定</a:t>
             </a:r>
-            <a:endParaRPr kumimoji="1" lang="ja-JP" altLang="en-US"/>
           </a:p>
         </p:txBody>
       </p:sp>
@@ -241,7 +280,7 @@
           <a:p>
             <a:fld id="{1336ADE1-296A-4F5D-8157-8329490341BB}" type="datetimeFigureOut">
               <a:rPr kumimoji="1" lang="ja-JP" altLang="en-US" smtClean="0"/>
-              <a:t>2026/1/30</a:t>
+              <a:t>2026/2/2</a:t>
             </a:fld>
             <a:endParaRPr kumimoji="1" lang="ja-JP" altLang="en-US"/>
           </a:p>
@@ -335,10 +374,9 @@
           <a:lstStyle/>
           <a:p>
             <a:r>
-              <a:rPr kumimoji="1" lang="ja-JP" altLang="en-US" smtClean="0"/>
+              <a:rPr kumimoji="1" lang="ja-JP" altLang="en-US"/>
               <a:t>マスター タイトルの書式設定</a:t>
             </a:r>
-            <a:endParaRPr kumimoji="1" lang="ja-JP" altLang="en-US"/>
           </a:p>
         </p:txBody>
       </p:sp>
@@ -359,70 +397,69 @@
           <a:p>
             <a:pPr lvl="0"/>
             <a:r>
-              <a:rPr kumimoji="1" lang="ja-JP" altLang="en-US" smtClean="0"/>
+              <a:rPr kumimoji="1" lang="ja-JP" altLang="en-US"/>
               <a:t>マスター テキストの書式設定</a:t>
             </a:r>
           </a:p>
           <a:p>
             <a:pPr lvl="1"/>
             <a:r>
-              <a:rPr kumimoji="1" lang="ja-JP" altLang="en-US" smtClean="0"/>
+              <a:rPr kumimoji="1" lang="ja-JP" altLang="en-US"/>
               <a:t>第 </a:t>
             </a:r>
             <a:r>
-              <a:rPr kumimoji="1" lang="en-US" altLang="ja-JP" smtClean="0"/>
+              <a:rPr kumimoji="1" lang="en-US" altLang="ja-JP"/>
               <a:t>2 </a:t>
             </a:r>
             <a:r>
-              <a:rPr kumimoji="1" lang="ja-JP" altLang="en-US" smtClean="0"/>
+              <a:rPr kumimoji="1" lang="ja-JP" altLang="en-US"/>
               <a:t>レベル</a:t>
             </a:r>
           </a:p>
           <a:p>
             <a:pPr lvl="2"/>
             <a:r>
-              <a:rPr kumimoji="1" lang="ja-JP" altLang="en-US" smtClean="0"/>
+              <a:rPr kumimoji="1" lang="ja-JP" altLang="en-US"/>
               <a:t>第 </a:t>
             </a:r>
             <a:r>
-              <a:rPr kumimoji="1" lang="en-US" altLang="ja-JP" smtClean="0"/>
+              <a:rPr kumimoji="1" lang="en-US" altLang="ja-JP"/>
               <a:t>3 </a:t>
             </a:r>
             <a:r>
-              <a:rPr kumimoji="1" lang="ja-JP" altLang="en-US" smtClean="0"/>
+              <a:rPr kumimoji="1" lang="ja-JP" altLang="en-US"/>
               <a:t>レベル</a:t>
             </a:r>
           </a:p>
           <a:p>
             <a:pPr lvl="3"/>
             <a:r>
-              <a:rPr kumimoji="1" lang="ja-JP" altLang="en-US" smtClean="0"/>
+              <a:rPr kumimoji="1" lang="ja-JP" altLang="en-US"/>
               <a:t>第 </a:t>
             </a:r>
             <a:r>
-              <a:rPr kumimoji="1" lang="en-US" altLang="ja-JP" smtClean="0"/>
+              <a:rPr kumimoji="1" lang="en-US" altLang="ja-JP"/>
               <a:t>4 </a:t>
             </a:r>
             <a:r>
-              <a:rPr kumimoji="1" lang="ja-JP" altLang="en-US" smtClean="0"/>
+              <a:rPr kumimoji="1" lang="ja-JP" altLang="en-US"/>
               <a:t>レベル</a:t>
             </a:r>
           </a:p>
           <a:p>
             <a:pPr lvl="4"/>
             <a:r>
-              <a:rPr kumimoji="1" lang="ja-JP" altLang="en-US" smtClean="0"/>
+              <a:rPr kumimoji="1" lang="ja-JP" altLang="en-US"/>
               <a:t>第 </a:t>
             </a:r>
             <a:r>
-              <a:rPr kumimoji="1" lang="en-US" altLang="ja-JP" smtClean="0"/>
+              <a:rPr kumimoji="1" lang="en-US" altLang="ja-JP"/>
               <a:t>5 </a:t>
             </a:r>
             <a:r>
-              <a:rPr kumimoji="1" lang="ja-JP" altLang="en-US" smtClean="0"/>
+              <a:rPr kumimoji="1" lang="ja-JP" altLang="en-US"/>
               <a:t>レベル</a:t>
             </a:r>
-            <a:endParaRPr kumimoji="1" lang="ja-JP" altLang="en-US"/>
           </a:p>
         </p:txBody>
       </p:sp>
@@ -443,7 +480,7 @@
           <a:p>
             <a:fld id="{1336ADE1-296A-4F5D-8157-8329490341BB}" type="datetimeFigureOut">
               <a:rPr kumimoji="1" lang="ja-JP" altLang="en-US" smtClean="0"/>
-              <a:t>2026/1/30</a:t>
+              <a:t>2026/2/2</a:t>
             </a:fld>
             <a:endParaRPr kumimoji="1" lang="ja-JP" altLang="en-US"/>
           </a:p>
@@ -542,10 +579,9 @@
           <a:lstStyle/>
           <a:p>
             <a:r>
-              <a:rPr kumimoji="1" lang="ja-JP" altLang="en-US" smtClean="0"/>
+              <a:rPr kumimoji="1" lang="ja-JP" altLang="en-US"/>
               <a:t>マスター タイトルの書式設定</a:t>
             </a:r>
-            <a:endParaRPr kumimoji="1" lang="ja-JP" altLang="en-US"/>
           </a:p>
         </p:txBody>
       </p:sp>
@@ -571,70 +607,69 @@
           <a:p>
             <a:pPr lvl="0"/>
             <a:r>
-              <a:rPr kumimoji="1" lang="ja-JP" altLang="en-US" smtClean="0"/>
+              <a:rPr kumimoji="1" lang="ja-JP" altLang="en-US"/>
               <a:t>マスター テキストの書式設定</a:t>
             </a:r>
           </a:p>
           <a:p>
             <a:pPr lvl="1"/>
             <a:r>
-              <a:rPr kumimoji="1" lang="ja-JP" altLang="en-US" smtClean="0"/>
+              <a:rPr kumimoji="1" lang="ja-JP" altLang="en-US"/>
               <a:t>第 </a:t>
             </a:r>
             <a:r>
-              <a:rPr kumimoji="1" lang="en-US" altLang="ja-JP" smtClean="0"/>
+              <a:rPr kumimoji="1" lang="en-US" altLang="ja-JP"/>
               <a:t>2 </a:t>
             </a:r>
             <a:r>
-              <a:rPr kumimoji="1" lang="ja-JP" altLang="en-US" smtClean="0"/>
+              <a:rPr kumimoji="1" lang="ja-JP" altLang="en-US"/>
               <a:t>レベル</a:t>
             </a:r>
           </a:p>
           <a:p>
             <a:pPr lvl="2"/>
             <a:r>
-              <a:rPr kumimoji="1" lang="ja-JP" altLang="en-US" smtClean="0"/>
+              <a:rPr kumimoji="1" lang="ja-JP" altLang="en-US"/>
               <a:t>第 </a:t>
             </a:r>
             <a:r>
-              <a:rPr kumimoji="1" lang="en-US" altLang="ja-JP" smtClean="0"/>
+              <a:rPr kumimoji="1" lang="en-US" altLang="ja-JP"/>
               <a:t>3 </a:t>
             </a:r>
             <a:r>
-              <a:rPr kumimoji="1" lang="ja-JP" altLang="en-US" smtClean="0"/>
+              <a:rPr kumimoji="1" lang="ja-JP" altLang="en-US"/>
               <a:t>レベル</a:t>
             </a:r>
           </a:p>
           <a:p>
             <a:pPr lvl="3"/>
             <a:r>
-              <a:rPr kumimoji="1" lang="ja-JP" altLang="en-US" smtClean="0"/>
+              <a:rPr kumimoji="1" lang="ja-JP" altLang="en-US"/>
               <a:t>第 </a:t>
             </a:r>
             <a:r>
-              <a:rPr kumimoji="1" lang="en-US" altLang="ja-JP" smtClean="0"/>
+              <a:rPr kumimoji="1" lang="en-US" altLang="ja-JP"/>
               <a:t>4 </a:t>
             </a:r>
             <a:r>
-              <a:rPr kumimoji="1" lang="ja-JP" altLang="en-US" smtClean="0"/>
+              <a:rPr kumimoji="1" lang="ja-JP" altLang="en-US"/>
               <a:t>レベル</a:t>
             </a:r>
           </a:p>
           <a:p>
             <a:pPr lvl="4"/>
             <a:r>
-              <a:rPr kumimoji="1" lang="ja-JP" altLang="en-US" smtClean="0"/>
+              <a:rPr kumimoji="1" lang="ja-JP" altLang="en-US"/>
               <a:t>第 </a:t>
             </a:r>
             <a:r>
-              <a:rPr kumimoji="1" lang="en-US" altLang="ja-JP" smtClean="0"/>
+              <a:rPr kumimoji="1" lang="en-US" altLang="ja-JP"/>
               <a:t>5 </a:t>
             </a:r>
             <a:r>
-              <a:rPr kumimoji="1" lang="ja-JP" altLang="en-US" smtClean="0"/>
+              <a:rPr kumimoji="1" lang="ja-JP" altLang="en-US"/>
               <a:t>レベル</a:t>
             </a:r>
-            <a:endParaRPr kumimoji="1" lang="ja-JP" altLang="en-US"/>
           </a:p>
         </p:txBody>
       </p:sp>
@@ -655,7 +690,7 @@
           <a:p>
             <a:fld id="{1336ADE1-296A-4F5D-8157-8329490341BB}" type="datetimeFigureOut">
               <a:rPr kumimoji="1" lang="ja-JP" altLang="en-US" smtClean="0"/>
-              <a:t>2026/1/30</a:t>
+              <a:t>2026/2/2</a:t>
             </a:fld>
             <a:endParaRPr kumimoji="1" lang="ja-JP" altLang="en-US"/>
           </a:p>
@@ -749,10 +784,9 @@
           <a:lstStyle/>
           <a:p>
             <a:r>
-              <a:rPr kumimoji="1" lang="ja-JP" altLang="en-US" smtClean="0"/>
+              <a:rPr kumimoji="1" lang="ja-JP" altLang="en-US"/>
               <a:t>マスター タイトルの書式設定</a:t>
             </a:r>
-            <a:endParaRPr kumimoji="1" lang="ja-JP" altLang="en-US"/>
           </a:p>
         </p:txBody>
       </p:sp>
@@ -773,70 +807,69 @@
           <a:p>
             <a:pPr lvl="0"/>
             <a:r>
-              <a:rPr kumimoji="1" lang="ja-JP" altLang="en-US" smtClean="0"/>
+              <a:rPr kumimoji="1" lang="ja-JP" altLang="en-US"/>
               <a:t>マスター テキストの書式設定</a:t>
             </a:r>
           </a:p>
           <a:p>
             <a:pPr lvl="1"/>
             <a:r>
-              <a:rPr kumimoji="1" lang="ja-JP" altLang="en-US" smtClean="0"/>
+              <a:rPr kumimoji="1" lang="ja-JP" altLang="en-US"/>
               <a:t>第 </a:t>
             </a:r>
             <a:r>
-              <a:rPr kumimoji="1" lang="en-US" altLang="ja-JP" smtClean="0"/>
+              <a:rPr kumimoji="1" lang="en-US" altLang="ja-JP"/>
               <a:t>2 </a:t>
             </a:r>
             <a:r>
-              <a:rPr kumimoji="1" lang="ja-JP" altLang="en-US" smtClean="0"/>
+              <a:rPr kumimoji="1" lang="ja-JP" altLang="en-US"/>
               <a:t>レベル</a:t>
             </a:r>
           </a:p>
           <a:p>
             <a:pPr lvl="2"/>
             <a:r>
-              <a:rPr kumimoji="1" lang="ja-JP" altLang="en-US" smtClean="0"/>
+              <a:rPr kumimoji="1" lang="ja-JP" altLang="en-US"/>
               <a:t>第 </a:t>
             </a:r>
             <a:r>
-              <a:rPr kumimoji="1" lang="en-US" altLang="ja-JP" smtClean="0"/>
+              <a:rPr kumimoji="1" lang="en-US" altLang="ja-JP"/>
               <a:t>3 </a:t>
             </a:r>
             <a:r>
-              <a:rPr kumimoji="1" lang="ja-JP" altLang="en-US" smtClean="0"/>
+              <a:rPr kumimoji="1" lang="ja-JP" altLang="en-US"/>
               <a:t>レベル</a:t>
             </a:r>
           </a:p>
           <a:p>
             <a:pPr lvl="3"/>
             <a:r>
-              <a:rPr kumimoji="1" lang="ja-JP" altLang="en-US" smtClean="0"/>
+              <a:rPr kumimoji="1" lang="ja-JP" altLang="en-US"/>
               <a:t>第 </a:t>
             </a:r>
             <a:r>
-              <a:rPr kumimoji="1" lang="en-US" altLang="ja-JP" smtClean="0"/>
+              <a:rPr kumimoji="1" lang="en-US" altLang="ja-JP"/>
               <a:t>4 </a:t>
             </a:r>
             <a:r>
-              <a:rPr kumimoji="1" lang="ja-JP" altLang="en-US" smtClean="0"/>
+              <a:rPr kumimoji="1" lang="ja-JP" altLang="en-US"/>
               <a:t>レベル</a:t>
             </a:r>
           </a:p>
           <a:p>
             <a:pPr lvl="4"/>
             <a:r>
-              <a:rPr kumimoji="1" lang="ja-JP" altLang="en-US" smtClean="0"/>
+              <a:rPr kumimoji="1" lang="ja-JP" altLang="en-US"/>
               <a:t>第 </a:t>
             </a:r>
             <a:r>
-              <a:rPr kumimoji="1" lang="en-US" altLang="ja-JP" smtClean="0"/>
+              <a:rPr kumimoji="1" lang="en-US" altLang="ja-JP"/>
               <a:t>5 </a:t>
             </a:r>
             <a:r>
-              <a:rPr kumimoji="1" lang="ja-JP" altLang="en-US" smtClean="0"/>
+              <a:rPr kumimoji="1" lang="ja-JP" altLang="en-US"/>
               <a:t>レベル</a:t>
             </a:r>
-            <a:endParaRPr kumimoji="1" lang="ja-JP" altLang="en-US"/>
           </a:p>
         </p:txBody>
       </p:sp>
@@ -857,7 +890,7 @@
           <a:p>
             <a:fld id="{1336ADE1-296A-4F5D-8157-8329490341BB}" type="datetimeFigureOut">
               <a:rPr kumimoji="1" lang="ja-JP" altLang="en-US" smtClean="0"/>
-              <a:t>2026/1/30</a:t>
+              <a:t>2026/2/2</a:t>
             </a:fld>
             <a:endParaRPr kumimoji="1" lang="ja-JP" altLang="en-US"/>
           </a:p>
@@ -960,10 +993,9 @@
           </a:lstStyle>
           <a:p>
             <a:r>
-              <a:rPr kumimoji="1" lang="ja-JP" altLang="en-US" smtClean="0"/>
+              <a:rPr kumimoji="1" lang="ja-JP" altLang="en-US"/>
               <a:t>マスター タイトルの書式設定</a:t>
             </a:r>
-            <a:endParaRPr kumimoji="1" lang="ja-JP" altLang="en-US"/>
           </a:p>
         </p:txBody>
       </p:sp>
@@ -1080,7 +1112,7 @@
           <a:p>
             <a:pPr lvl="0"/>
             <a:r>
-              <a:rPr kumimoji="1" lang="ja-JP" altLang="en-US" smtClean="0"/>
+              <a:rPr kumimoji="1" lang="ja-JP" altLang="en-US"/>
               <a:t>マスター テキストの書式設定</a:t>
             </a:r>
           </a:p>
@@ -1103,7 +1135,7 @@
           <a:p>
             <a:fld id="{1336ADE1-296A-4F5D-8157-8329490341BB}" type="datetimeFigureOut">
               <a:rPr kumimoji="1" lang="ja-JP" altLang="en-US" smtClean="0"/>
-              <a:t>2026/1/30</a:t>
+              <a:t>2026/2/2</a:t>
             </a:fld>
             <a:endParaRPr kumimoji="1" lang="ja-JP" altLang="en-US"/>
           </a:p>
@@ -1197,10 +1229,9 @@
           <a:lstStyle/>
           <a:p>
             <a:r>
-              <a:rPr kumimoji="1" lang="ja-JP" altLang="en-US" smtClean="0"/>
+              <a:rPr kumimoji="1" lang="ja-JP" altLang="en-US"/>
               <a:t>マスター タイトルの書式設定</a:t>
             </a:r>
-            <a:endParaRPr kumimoji="1" lang="ja-JP" altLang="en-US"/>
           </a:p>
         </p:txBody>
       </p:sp>
@@ -1226,70 +1257,69 @@
           <a:p>
             <a:pPr lvl="0"/>
             <a:r>
-              <a:rPr kumimoji="1" lang="ja-JP" altLang="en-US" smtClean="0"/>
+              <a:rPr kumimoji="1" lang="ja-JP" altLang="en-US"/>
               <a:t>マスター テキストの書式設定</a:t>
             </a:r>
           </a:p>
           <a:p>
             <a:pPr lvl="1"/>
             <a:r>
-              <a:rPr kumimoji="1" lang="ja-JP" altLang="en-US" smtClean="0"/>
+              <a:rPr kumimoji="1" lang="ja-JP" altLang="en-US"/>
               <a:t>第 </a:t>
             </a:r>
             <a:r>
-              <a:rPr kumimoji="1" lang="en-US" altLang="ja-JP" smtClean="0"/>
+              <a:rPr kumimoji="1" lang="en-US" altLang="ja-JP"/>
               <a:t>2 </a:t>
             </a:r>
             <a:r>
-              <a:rPr kumimoji="1" lang="ja-JP" altLang="en-US" smtClean="0"/>
+              <a:rPr kumimoji="1" lang="ja-JP" altLang="en-US"/>
               <a:t>レベル</a:t>
             </a:r>
           </a:p>
           <a:p>
             <a:pPr lvl="2"/>
             <a:r>
-              <a:rPr kumimoji="1" lang="ja-JP" altLang="en-US" smtClean="0"/>
+              <a:rPr kumimoji="1" lang="ja-JP" altLang="en-US"/>
               <a:t>第 </a:t>
             </a:r>
             <a:r>
-              <a:rPr kumimoji="1" lang="en-US" altLang="ja-JP" smtClean="0"/>
+              <a:rPr kumimoji="1" lang="en-US" altLang="ja-JP"/>
               <a:t>3 </a:t>
             </a:r>
             <a:r>
-              <a:rPr kumimoji="1" lang="ja-JP" altLang="en-US" smtClean="0"/>
+              <a:rPr kumimoji="1" lang="ja-JP" altLang="en-US"/>
               <a:t>レベル</a:t>
             </a:r>
           </a:p>
           <a:p>
             <a:pPr lvl="3"/>
             <a:r>
-              <a:rPr kumimoji="1" lang="ja-JP" altLang="en-US" smtClean="0"/>
+              <a:rPr kumimoji="1" lang="ja-JP" altLang="en-US"/>
               <a:t>第 </a:t>
             </a:r>
             <a:r>
-              <a:rPr kumimoji="1" lang="en-US" altLang="ja-JP" smtClean="0"/>
+              <a:rPr kumimoji="1" lang="en-US" altLang="ja-JP"/>
               <a:t>4 </a:t>
             </a:r>
             <a:r>
-              <a:rPr kumimoji="1" lang="ja-JP" altLang="en-US" smtClean="0"/>
+              <a:rPr kumimoji="1" lang="ja-JP" altLang="en-US"/>
               <a:t>レベル</a:t>
             </a:r>
           </a:p>
           <a:p>
             <a:pPr lvl="4"/>
             <a:r>
-              <a:rPr kumimoji="1" lang="ja-JP" altLang="en-US" smtClean="0"/>
+              <a:rPr kumimoji="1" lang="ja-JP" altLang="en-US"/>
               <a:t>第 </a:t>
             </a:r>
             <a:r>
-              <a:rPr kumimoji="1" lang="en-US" altLang="ja-JP" smtClean="0"/>
+              <a:rPr kumimoji="1" lang="en-US" altLang="ja-JP"/>
               <a:t>5 </a:t>
             </a:r>
             <a:r>
-              <a:rPr kumimoji="1" lang="ja-JP" altLang="en-US" smtClean="0"/>
+              <a:rPr kumimoji="1" lang="ja-JP" altLang="en-US"/>
               <a:t>レベル</a:t>
             </a:r>
-            <a:endParaRPr kumimoji="1" lang="ja-JP" altLang="en-US"/>
           </a:p>
         </p:txBody>
       </p:sp>
@@ -1315,70 +1345,69 @@
           <a:p>
             <a:pPr lvl="0"/>
             <a:r>
-              <a:rPr kumimoji="1" lang="ja-JP" altLang="en-US" smtClean="0"/>
+              <a:rPr kumimoji="1" lang="ja-JP" altLang="en-US"/>
               <a:t>マスター テキストの書式設定</a:t>
             </a:r>
           </a:p>
           <a:p>
             <a:pPr lvl="1"/>
             <a:r>
-              <a:rPr kumimoji="1" lang="ja-JP" altLang="en-US" smtClean="0"/>
+              <a:rPr kumimoji="1" lang="ja-JP" altLang="en-US"/>
               <a:t>第 </a:t>
             </a:r>
             <a:r>
-              <a:rPr kumimoji="1" lang="en-US" altLang="ja-JP" smtClean="0"/>
+              <a:rPr kumimoji="1" lang="en-US" altLang="ja-JP"/>
               <a:t>2 </a:t>
             </a:r>
             <a:r>
-              <a:rPr kumimoji="1" lang="ja-JP" altLang="en-US" smtClean="0"/>
+              <a:rPr kumimoji="1" lang="ja-JP" altLang="en-US"/>
               <a:t>レベル</a:t>
             </a:r>
           </a:p>
           <a:p>
             <a:pPr lvl="2"/>
             <a:r>
-              <a:rPr kumimoji="1" lang="ja-JP" altLang="en-US" smtClean="0"/>
+              <a:rPr kumimoji="1" lang="ja-JP" altLang="en-US"/>
               <a:t>第 </a:t>
             </a:r>
             <a:r>
-              <a:rPr kumimoji="1" lang="en-US" altLang="ja-JP" smtClean="0"/>
+              <a:rPr kumimoji="1" lang="en-US" altLang="ja-JP"/>
               <a:t>3 </a:t>
             </a:r>
             <a:r>
-              <a:rPr kumimoji="1" lang="ja-JP" altLang="en-US" smtClean="0"/>
+              <a:rPr kumimoji="1" lang="ja-JP" altLang="en-US"/>
               <a:t>レベル</a:t>
             </a:r>
           </a:p>
           <a:p>
             <a:pPr lvl="3"/>
             <a:r>
-              <a:rPr kumimoji="1" lang="ja-JP" altLang="en-US" smtClean="0"/>
+              <a:rPr kumimoji="1" lang="ja-JP" altLang="en-US"/>
               <a:t>第 </a:t>
             </a:r>
             <a:r>
-              <a:rPr kumimoji="1" lang="en-US" altLang="ja-JP" smtClean="0"/>
+              <a:rPr kumimoji="1" lang="en-US" altLang="ja-JP"/>
               <a:t>4 </a:t>
             </a:r>
             <a:r>
-              <a:rPr kumimoji="1" lang="ja-JP" altLang="en-US" smtClean="0"/>
+              <a:rPr kumimoji="1" lang="ja-JP" altLang="en-US"/>
               <a:t>レベル</a:t>
             </a:r>
           </a:p>
           <a:p>
             <a:pPr lvl="4"/>
             <a:r>
-              <a:rPr kumimoji="1" lang="ja-JP" altLang="en-US" smtClean="0"/>
+              <a:rPr kumimoji="1" lang="ja-JP" altLang="en-US"/>
               <a:t>第 </a:t>
             </a:r>
             <a:r>
-              <a:rPr kumimoji="1" lang="en-US" altLang="ja-JP" smtClean="0"/>
+              <a:rPr kumimoji="1" lang="en-US" altLang="ja-JP"/>
               <a:t>5 </a:t>
             </a:r>
             <a:r>
-              <a:rPr kumimoji="1" lang="ja-JP" altLang="en-US" smtClean="0"/>
+              <a:rPr kumimoji="1" lang="ja-JP" altLang="en-US"/>
               <a:t>レベル</a:t>
             </a:r>
-            <a:endParaRPr kumimoji="1" lang="ja-JP" altLang="en-US"/>
           </a:p>
         </p:txBody>
       </p:sp>
@@ -1399,7 +1428,7 @@
           <a:p>
             <a:fld id="{1336ADE1-296A-4F5D-8157-8329490341BB}" type="datetimeFigureOut">
               <a:rPr kumimoji="1" lang="ja-JP" altLang="en-US" smtClean="0"/>
-              <a:t>2026/1/30</a:t>
+              <a:t>2026/2/2</a:t>
             </a:fld>
             <a:endParaRPr kumimoji="1" lang="ja-JP" altLang="en-US"/>
           </a:p>
@@ -1498,10 +1527,9 @@
           <a:lstStyle/>
           <a:p>
             <a:r>
-              <a:rPr kumimoji="1" lang="ja-JP" altLang="en-US" smtClean="0"/>
+              <a:rPr kumimoji="1" lang="ja-JP" altLang="en-US"/>
               <a:t>マスター タイトルの書式設定</a:t>
             </a:r>
-            <a:endParaRPr kumimoji="1" lang="ja-JP" altLang="en-US"/>
           </a:p>
         </p:txBody>
       </p:sp>
@@ -1564,7 +1592,7 @@
           <a:p>
             <a:pPr lvl="0"/>
             <a:r>
-              <a:rPr kumimoji="1" lang="ja-JP" altLang="en-US" smtClean="0"/>
+              <a:rPr kumimoji="1" lang="ja-JP" altLang="en-US"/>
               <a:t>マスター テキストの書式設定</a:t>
             </a:r>
           </a:p>
@@ -1592,70 +1620,69 @@
           <a:p>
             <a:pPr lvl="0"/>
             <a:r>
-              <a:rPr kumimoji="1" lang="ja-JP" altLang="en-US" smtClean="0"/>
+              <a:rPr kumimoji="1" lang="ja-JP" altLang="en-US"/>
               <a:t>マスター テキストの書式設定</a:t>
             </a:r>
           </a:p>
           <a:p>
             <a:pPr lvl="1"/>
             <a:r>
-              <a:rPr kumimoji="1" lang="ja-JP" altLang="en-US" smtClean="0"/>
+              <a:rPr kumimoji="1" lang="ja-JP" altLang="en-US"/>
               <a:t>第 </a:t>
             </a:r>
             <a:r>
-              <a:rPr kumimoji="1" lang="en-US" altLang="ja-JP" smtClean="0"/>
+              <a:rPr kumimoji="1" lang="en-US" altLang="ja-JP"/>
               <a:t>2 </a:t>
             </a:r>
             <a:r>
-              <a:rPr kumimoji="1" lang="ja-JP" altLang="en-US" smtClean="0"/>
+              <a:rPr kumimoji="1" lang="ja-JP" altLang="en-US"/>
               <a:t>レベル</a:t>
             </a:r>
           </a:p>
           <a:p>
             <a:pPr lvl="2"/>
             <a:r>
-              <a:rPr kumimoji="1" lang="ja-JP" altLang="en-US" smtClean="0"/>
+              <a:rPr kumimoji="1" lang="ja-JP" altLang="en-US"/>
               <a:t>第 </a:t>
             </a:r>
             <a:r>
-              <a:rPr kumimoji="1" lang="en-US" altLang="ja-JP" smtClean="0"/>
+              <a:rPr kumimoji="1" lang="en-US" altLang="ja-JP"/>
               <a:t>3 </a:t>
             </a:r>
             <a:r>
-              <a:rPr kumimoji="1" lang="ja-JP" altLang="en-US" smtClean="0"/>
+              <a:rPr kumimoji="1" lang="ja-JP" altLang="en-US"/>
               <a:t>レベル</a:t>
             </a:r>
           </a:p>
           <a:p>
             <a:pPr lvl="3"/>
             <a:r>
-              <a:rPr kumimoji="1" lang="ja-JP" altLang="en-US" smtClean="0"/>
+              <a:rPr kumimoji="1" lang="ja-JP" altLang="en-US"/>
               <a:t>第 </a:t>
             </a:r>
             <a:r>
-              <a:rPr kumimoji="1" lang="en-US" altLang="ja-JP" smtClean="0"/>
+              <a:rPr kumimoji="1" lang="en-US" altLang="ja-JP"/>
               <a:t>4 </a:t>
             </a:r>
             <a:r>
-              <a:rPr kumimoji="1" lang="ja-JP" altLang="en-US" smtClean="0"/>
+              <a:rPr kumimoji="1" lang="ja-JP" altLang="en-US"/>
               <a:t>レベル</a:t>
             </a:r>
           </a:p>
           <a:p>
             <a:pPr lvl="4"/>
             <a:r>
-              <a:rPr kumimoji="1" lang="ja-JP" altLang="en-US" smtClean="0"/>
+              <a:rPr kumimoji="1" lang="ja-JP" altLang="en-US"/>
               <a:t>第 </a:t>
             </a:r>
             <a:r>
-              <a:rPr kumimoji="1" lang="en-US" altLang="ja-JP" smtClean="0"/>
+              <a:rPr kumimoji="1" lang="en-US" altLang="ja-JP"/>
               <a:t>5 </a:t>
             </a:r>
             <a:r>
-              <a:rPr kumimoji="1" lang="ja-JP" altLang="en-US" smtClean="0"/>
+              <a:rPr kumimoji="1" lang="ja-JP" altLang="en-US"/>
               <a:t>レベル</a:t>
             </a:r>
-            <a:endParaRPr kumimoji="1" lang="ja-JP" altLang="en-US"/>
           </a:p>
         </p:txBody>
       </p:sp>
@@ -1718,7 +1745,7 @@
           <a:p>
             <a:pPr lvl="0"/>
             <a:r>
-              <a:rPr kumimoji="1" lang="ja-JP" altLang="en-US" smtClean="0"/>
+              <a:rPr kumimoji="1" lang="ja-JP" altLang="en-US"/>
               <a:t>マスター テキストの書式設定</a:t>
             </a:r>
           </a:p>
@@ -1746,70 +1773,69 @@
           <a:p>
             <a:pPr lvl="0"/>
             <a:r>
-              <a:rPr kumimoji="1" lang="ja-JP" altLang="en-US" smtClean="0"/>
+              <a:rPr kumimoji="1" lang="ja-JP" altLang="en-US"/>
               <a:t>マスター テキストの書式設定</a:t>
             </a:r>
           </a:p>
           <a:p>
             <a:pPr lvl="1"/>
             <a:r>
-              <a:rPr kumimoji="1" lang="ja-JP" altLang="en-US" smtClean="0"/>
+              <a:rPr kumimoji="1" lang="ja-JP" altLang="en-US"/>
               <a:t>第 </a:t>
             </a:r>
             <a:r>
-              <a:rPr kumimoji="1" lang="en-US" altLang="ja-JP" smtClean="0"/>
+              <a:rPr kumimoji="1" lang="en-US" altLang="ja-JP"/>
               <a:t>2 </a:t>
             </a:r>
             <a:r>
-              <a:rPr kumimoji="1" lang="ja-JP" altLang="en-US" smtClean="0"/>
+              <a:rPr kumimoji="1" lang="ja-JP" altLang="en-US"/>
               <a:t>レベル</a:t>
             </a:r>
           </a:p>
           <a:p>
             <a:pPr lvl="2"/>
             <a:r>
-              <a:rPr kumimoji="1" lang="ja-JP" altLang="en-US" smtClean="0"/>
+              <a:rPr kumimoji="1" lang="ja-JP" altLang="en-US"/>
               <a:t>第 </a:t>
             </a:r>
             <a:r>
-              <a:rPr kumimoji="1" lang="en-US" altLang="ja-JP" smtClean="0"/>
+              <a:rPr kumimoji="1" lang="en-US" altLang="ja-JP"/>
               <a:t>3 </a:t>
             </a:r>
             <a:r>
-              <a:rPr kumimoji="1" lang="ja-JP" altLang="en-US" smtClean="0"/>
+              <a:rPr kumimoji="1" lang="ja-JP" altLang="en-US"/>
               <a:t>レベル</a:t>
             </a:r>
           </a:p>
           <a:p>
             <a:pPr lvl="3"/>
             <a:r>
-              <a:rPr kumimoji="1" lang="ja-JP" altLang="en-US" smtClean="0"/>
+              <a:rPr kumimoji="1" lang="ja-JP" altLang="en-US"/>
               <a:t>第 </a:t>
             </a:r>
             <a:r>
-              <a:rPr kumimoji="1" lang="en-US" altLang="ja-JP" smtClean="0"/>
+              <a:rPr kumimoji="1" lang="en-US" altLang="ja-JP"/>
               <a:t>4 </a:t>
             </a:r>
             <a:r>
-              <a:rPr kumimoji="1" lang="ja-JP" altLang="en-US" smtClean="0"/>
+              <a:rPr kumimoji="1" lang="ja-JP" altLang="en-US"/>
               <a:t>レベル</a:t>
             </a:r>
           </a:p>
           <a:p>
             <a:pPr lvl="4"/>
             <a:r>
-              <a:rPr kumimoji="1" lang="ja-JP" altLang="en-US" smtClean="0"/>
+              <a:rPr kumimoji="1" lang="ja-JP" altLang="en-US"/>
               <a:t>第 </a:t>
             </a:r>
             <a:r>
-              <a:rPr kumimoji="1" lang="en-US" altLang="ja-JP" smtClean="0"/>
+              <a:rPr kumimoji="1" lang="en-US" altLang="ja-JP"/>
               <a:t>5 </a:t>
             </a:r>
             <a:r>
-              <a:rPr kumimoji="1" lang="ja-JP" altLang="en-US" smtClean="0"/>
+              <a:rPr kumimoji="1" lang="ja-JP" altLang="en-US"/>
               <a:t>レベル</a:t>
             </a:r>
-            <a:endParaRPr kumimoji="1" lang="ja-JP" altLang="en-US"/>
           </a:p>
         </p:txBody>
       </p:sp>
@@ -1830,7 +1856,7 @@
           <a:p>
             <a:fld id="{1336ADE1-296A-4F5D-8157-8329490341BB}" type="datetimeFigureOut">
               <a:rPr kumimoji="1" lang="ja-JP" altLang="en-US" smtClean="0"/>
-              <a:t>2026/1/30</a:t>
+              <a:t>2026/2/2</a:t>
             </a:fld>
             <a:endParaRPr kumimoji="1" lang="ja-JP" altLang="en-US"/>
           </a:p>
@@ -1924,10 +1950,9 @@
           <a:lstStyle/>
           <a:p>
             <a:r>
-              <a:rPr kumimoji="1" lang="ja-JP" altLang="en-US" smtClean="0"/>
+              <a:rPr kumimoji="1" lang="ja-JP" altLang="en-US"/>
               <a:t>マスター タイトルの書式設定</a:t>
             </a:r>
-            <a:endParaRPr kumimoji="1" lang="ja-JP" altLang="en-US"/>
           </a:p>
         </p:txBody>
       </p:sp>
@@ -1948,7 +1973,7 @@
           <a:p>
             <a:fld id="{1336ADE1-296A-4F5D-8157-8329490341BB}" type="datetimeFigureOut">
               <a:rPr kumimoji="1" lang="ja-JP" altLang="en-US" smtClean="0"/>
-              <a:t>2026/1/30</a:t>
+              <a:t>2026/2/2</a:t>
             </a:fld>
             <a:endParaRPr kumimoji="1" lang="ja-JP" altLang="en-US"/>
           </a:p>
@@ -2043,7 +2068,7 @@
           <a:p>
             <a:fld id="{1336ADE1-296A-4F5D-8157-8329490341BB}" type="datetimeFigureOut">
               <a:rPr kumimoji="1" lang="ja-JP" altLang="en-US" smtClean="0"/>
-              <a:t>2026/1/30</a:t>
+              <a:t>2026/2/2</a:t>
             </a:fld>
             <a:endParaRPr kumimoji="1" lang="ja-JP" altLang="en-US"/>
           </a:p>
@@ -2146,10 +2171,9 @@
           </a:lstStyle>
           <a:p>
             <a:r>
-              <a:rPr kumimoji="1" lang="ja-JP" altLang="en-US" smtClean="0"/>
+              <a:rPr kumimoji="1" lang="ja-JP" altLang="en-US"/>
               <a:t>マスター タイトルの書式設定</a:t>
             </a:r>
-            <a:endParaRPr kumimoji="1" lang="ja-JP" altLang="en-US"/>
           </a:p>
         </p:txBody>
       </p:sp>
@@ -2203,70 +2227,69 @@
           <a:p>
             <a:pPr lvl="0"/>
             <a:r>
-              <a:rPr kumimoji="1" lang="ja-JP" altLang="en-US" smtClean="0"/>
+              <a:rPr kumimoji="1" lang="ja-JP" altLang="en-US"/>
               <a:t>マスター テキストの書式設定</a:t>
             </a:r>
           </a:p>
           <a:p>
             <a:pPr lvl="1"/>
             <a:r>
-              <a:rPr kumimoji="1" lang="ja-JP" altLang="en-US" smtClean="0"/>
+              <a:rPr kumimoji="1" lang="ja-JP" altLang="en-US"/>
               <a:t>第 </a:t>
             </a:r>
             <a:r>
-              <a:rPr kumimoji="1" lang="en-US" altLang="ja-JP" smtClean="0"/>
+              <a:rPr kumimoji="1" lang="en-US" altLang="ja-JP"/>
               <a:t>2 </a:t>
             </a:r>
             <a:r>
-              <a:rPr kumimoji="1" lang="ja-JP" altLang="en-US" smtClean="0"/>
+              <a:rPr kumimoji="1" lang="ja-JP" altLang="en-US"/>
               <a:t>レベル</a:t>
             </a:r>
           </a:p>
           <a:p>
             <a:pPr lvl="2"/>
             <a:r>
-              <a:rPr kumimoji="1" lang="ja-JP" altLang="en-US" smtClean="0"/>
+              <a:rPr kumimoji="1" lang="ja-JP" altLang="en-US"/>
               <a:t>第 </a:t>
             </a:r>
             <a:r>
-              <a:rPr kumimoji="1" lang="en-US" altLang="ja-JP" smtClean="0"/>
+              <a:rPr kumimoji="1" lang="en-US" altLang="ja-JP"/>
               <a:t>3 </a:t>
             </a:r>
             <a:r>
-              <a:rPr kumimoji="1" lang="ja-JP" altLang="en-US" smtClean="0"/>
+              <a:rPr kumimoji="1" lang="ja-JP" altLang="en-US"/>
               <a:t>レベル</a:t>
             </a:r>
           </a:p>
           <a:p>
             <a:pPr lvl="3"/>
             <a:r>
-              <a:rPr kumimoji="1" lang="ja-JP" altLang="en-US" smtClean="0"/>
+              <a:rPr kumimoji="1" lang="ja-JP" altLang="en-US"/>
               <a:t>第 </a:t>
             </a:r>
             <a:r>
-              <a:rPr kumimoji="1" lang="en-US" altLang="ja-JP" smtClean="0"/>
+              <a:rPr kumimoji="1" lang="en-US" altLang="ja-JP"/>
               <a:t>4 </a:t>
             </a:r>
             <a:r>
-              <a:rPr kumimoji="1" lang="ja-JP" altLang="en-US" smtClean="0"/>
+              <a:rPr kumimoji="1" lang="ja-JP" altLang="en-US"/>
               <a:t>レベル</a:t>
             </a:r>
           </a:p>
           <a:p>
             <a:pPr lvl="4"/>
             <a:r>
-              <a:rPr kumimoji="1" lang="ja-JP" altLang="en-US" smtClean="0"/>
+              <a:rPr kumimoji="1" lang="ja-JP" altLang="en-US"/>
               <a:t>第 </a:t>
             </a:r>
             <a:r>
-              <a:rPr kumimoji="1" lang="en-US" altLang="ja-JP" smtClean="0"/>
+              <a:rPr kumimoji="1" lang="en-US" altLang="ja-JP"/>
               <a:t>5 </a:t>
             </a:r>
             <a:r>
-              <a:rPr kumimoji="1" lang="ja-JP" altLang="en-US" smtClean="0"/>
+              <a:rPr kumimoji="1" lang="ja-JP" altLang="en-US"/>
               <a:t>レベル</a:t>
             </a:r>
-            <a:endParaRPr kumimoji="1" lang="ja-JP" altLang="en-US"/>
           </a:p>
         </p:txBody>
       </p:sp>
@@ -2329,7 +2352,7 @@
           <a:p>
             <a:pPr lvl="0"/>
             <a:r>
-              <a:rPr kumimoji="1" lang="ja-JP" altLang="en-US" smtClean="0"/>
+              <a:rPr kumimoji="1" lang="ja-JP" altLang="en-US"/>
               <a:t>マスター テキストの書式設定</a:t>
             </a:r>
           </a:p>
@@ -2352,7 +2375,7 @@
           <a:p>
             <a:fld id="{1336ADE1-296A-4F5D-8157-8329490341BB}" type="datetimeFigureOut">
               <a:rPr kumimoji="1" lang="ja-JP" altLang="en-US" smtClean="0"/>
-              <a:t>2026/1/30</a:t>
+              <a:t>2026/2/2</a:t>
             </a:fld>
             <a:endParaRPr kumimoji="1" lang="ja-JP" altLang="en-US"/>
           </a:p>
@@ -2455,10 +2478,9 @@
           </a:lstStyle>
           <a:p>
             <a:r>
-              <a:rPr kumimoji="1" lang="ja-JP" altLang="en-US" smtClean="0"/>
+              <a:rPr kumimoji="1" lang="ja-JP" altLang="en-US"/>
               <a:t>マスター タイトルの書式設定</a:t>
             </a:r>
-            <a:endParaRPr kumimoji="1" lang="ja-JP" altLang="en-US"/>
           </a:p>
         </p:txBody>
       </p:sp>
@@ -2582,7 +2604,7 @@
           <a:p>
             <a:pPr lvl="0"/>
             <a:r>
-              <a:rPr kumimoji="1" lang="ja-JP" altLang="en-US" smtClean="0"/>
+              <a:rPr kumimoji="1" lang="ja-JP" altLang="en-US"/>
               <a:t>マスター テキストの書式設定</a:t>
             </a:r>
           </a:p>
@@ -2605,7 +2627,7 @@
           <a:p>
             <a:fld id="{1336ADE1-296A-4F5D-8157-8329490341BB}" type="datetimeFigureOut">
               <a:rPr kumimoji="1" lang="ja-JP" altLang="en-US" smtClean="0"/>
-              <a:t>2026/1/30</a:t>
+              <a:t>2026/2/2</a:t>
             </a:fld>
             <a:endParaRPr kumimoji="1" lang="ja-JP" altLang="en-US"/>
           </a:p>
@@ -2714,10 +2736,9 @@
           <a:lstStyle/>
           <a:p>
             <a:r>
-              <a:rPr kumimoji="1" lang="ja-JP" altLang="en-US" smtClean="0"/>
+              <a:rPr kumimoji="1" lang="ja-JP" altLang="en-US"/>
               <a:t>マスター タイトルの書式設定</a:t>
             </a:r>
-            <a:endParaRPr kumimoji="1" lang="ja-JP" altLang="en-US"/>
           </a:p>
         </p:txBody>
       </p:sp>
@@ -2748,70 +2769,69 @@
           <a:p>
             <a:pPr lvl="0"/>
             <a:r>
-              <a:rPr kumimoji="1" lang="ja-JP" altLang="en-US" smtClean="0"/>
+              <a:rPr kumimoji="1" lang="ja-JP" altLang="en-US"/>
               <a:t>マスター テキストの書式設定</a:t>
             </a:r>
           </a:p>
           <a:p>
             <a:pPr lvl="1"/>
             <a:r>
-              <a:rPr kumimoji="1" lang="ja-JP" altLang="en-US" smtClean="0"/>
+              <a:rPr kumimoji="1" lang="ja-JP" altLang="en-US"/>
               <a:t>第 </a:t>
             </a:r>
             <a:r>
-              <a:rPr kumimoji="1" lang="en-US" altLang="ja-JP" smtClean="0"/>
+              <a:rPr kumimoji="1" lang="en-US" altLang="ja-JP"/>
               <a:t>2 </a:t>
             </a:r>
             <a:r>
-              <a:rPr kumimoji="1" lang="ja-JP" altLang="en-US" smtClean="0"/>
+              <a:rPr kumimoji="1" lang="ja-JP" altLang="en-US"/>
               <a:t>レベル</a:t>
             </a:r>
           </a:p>
           <a:p>
             <a:pPr lvl="2"/>
             <a:r>
-              <a:rPr kumimoji="1" lang="ja-JP" altLang="en-US" smtClean="0"/>
+              <a:rPr kumimoji="1" lang="ja-JP" altLang="en-US"/>
               <a:t>第 </a:t>
             </a:r>
             <a:r>
-              <a:rPr kumimoji="1" lang="en-US" altLang="ja-JP" smtClean="0"/>
+              <a:rPr kumimoji="1" lang="en-US" altLang="ja-JP"/>
               <a:t>3 </a:t>
             </a:r>
             <a:r>
-              <a:rPr kumimoji="1" lang="ja-JP" altLang="en-US" smtClean="0"/>
+              <a:rPr kumimoji="1" lang="ja-JP" altLang="en-US"/>
               <a:t>レベル</a:t>
             </a:r>
           </a:p>
           <a:p>
             <a:pPr lvl="3"/>
             <a:r>
-              <a:rPr kumimoji="1" lang="ja-JP" altLang="en-US" smtClean="0"/>
+              <a:rPr kumimoji="1" lang="ja-JP" altLang="en-US"/>
               <a:t>第 </a:t>
             </a:r>
             <a:r>
-              <a:rPr kumimoji="1" lang="en-US" altLang="ja-JP" smtClean="0"/>
+              <a:rPr kumimoji="1" lang="en-US" altLang="ja-JP"/>
               <a:t>4 </a:t>
             </a:r>
             <a:r>
-              <a:rPr kumimoji="1" lang="ja-JP" altLang="en-US" smtClean="0"/>
+              <a:rPr kumimoji="1" lang="ja-JP" altLang="en-US"/>
               <a:t>レベル</a:t>
             </a:r>
           </a:p>
           <a:p>
             <a:pPr lvl="4"/>
             <a:r>
-              <a:rPr kumimoji="1" lang="ja-JP" altLang="en-US" smtClean="0"/>
+              <a:rPr kumimoji="1" lang="ja-JP" altLang="en-US"/>
               <a:t>第 </a:t>
             </a:r>
             <a:r>
-              <a:rPr kumimoji="1" lang="en-US" altLang="ja-JP" smtClean="0"/>
+              <a:rPr kumimoji="1" lang="en-US" altLang="ja-JP"/>
               <a:t>5 </a:t>
             </a:r>
             <a:r>
-              <a:rPr kumimoji="1" lang="ja-JP" altLang="en-US" smtClean="0"/>
+              <a:rPr kumimoji="1" lang="ja-JP" altLang="en-US"/>
               <a:t>レベル</a:t>
             </a:r>
-            <a:endParaRPr kumimoji="1" lang="ja-JP" altLang="en-US"/>
           </a:p>
         </p:txBody>
       </p:sp>
@@ -2850,7 +2870,7 @@
           <a:p>
             <a:fld id="{1336ADE1-296A-4F5D-8157-8329490341BB}" type="datetimeFigureOut">
               <a:rPr kumimoji="1" lang="ja-JP" altLang="en-US" smtClean="0"/>
-              <a:t>2026/1/30</a:t>
+              <a:t>2026/2/2</a:t>
             </a:fld>
             <a:endParaRPr kumimoji="1" lang="ja-JP" altLang="en-US"/>
           </a:p>
@@ -3278,10 +3298,9 @@
           <a:lstStyle/>
           <a:p>
             <a:r>
-              <a:rPr kumimoji="1" lang="ja-JP" altLang="en-US" sz="5400" b="1" dirty="0" smtClean="0"/>
+              <a:rPr kumimoji="1" lang="ja-JP" altLang="en-US" sz="5400" b="1" dirty="0"/>
               <a:t>物理演算を制作した中で</a:t>
             </a:r>
-            <a:endParaRPr kumimoji="1" lang="ja-JP" altLang="en-US" sz="5400" b="1" dirty="0"/>
           </a:p>
         </p:txBody>
       </p:sp>
@@ -3308,10 +3327,9 @@
           <a:lstStyle/>
           <a:p>
             <a:r>
-              <a:rPr kumimoji="1" lang="ja-JP" altLang="en-US" sz="2400" b="1" dirty="0" smtClean="0"/>
+              <a:rPr kumimoji="1" lang="ja-JP" altLang="en-US" sz="2400" b="1" dirty="0"/>
               <a:t>元藤　唯斗</a:t>
             </a:r>
-            <a:endParaRPr kumimoji="1" lang="ja-JP" altLang="en-US" sz="2400" b="1" dirty="0"/>
           </a:p>
         </p:txBody>
       </p:sp>
@@ -3339,14 +3357,10 @@
           <a:p>
             <a:r>
               <a:rPr lang="ja-JP" altLang="en-US" sz="2400" b="1" dirty="0"/>
-              <a:t>情報</a:t>
-            </a:r>
-            <a:r>
-              <a:rPr lang="ja-JP" altLang="en-US" sz="2400" b="1" dirty="0" smtClean="0"/>
-              <a:t>クリエイタ工学科</a:t>
-            </a:r>
-            <a:r>
-              <a:rPr kumimoji="1" lang="ja-JP" altLang="en-US" sz="2400" b="1" dirty="0" smtClean="0"/>
+              <a:t>情報クリエイタ工学科</a:t>
+            </a:r>
+            <a:r>
+              <a:rPr kumimoji="1" lang="ja-JP" altLang="en-US" sz="2400" b="1" dirty="0"/>
               <a:t>　</a:t>
             </a:r>
             <a:r>
@@ -3354,10 +3368,9 @@
               <a:t>２</a:t>
             </a:r>
             <a:r>
-              <a:rPr kumimoji="1" lang="ja-JP" altLang="en-US" sz="2400" b="1" dirty="0" smtClean="0"/>
+              <a:rPr kumimoji="1" lang="ja-JP" altLang="en-US" sz="2400" b="1" dirty="0"/>
               <a:t>年</a:t>
             </a:r>
-            <a:endParaRPr kumimoji="1" lang="ja-JP" altLang="en-US" sz="2400" b="1" dirty="0"/>
           </a:p>
         </p:txBody>
       </p:sp>
@@ -3414,7 +3427,7 @@
           <a:lstStyle/>
           <a:p>
             <a:r>
-              <a:rPr lang="ja-JP" altLang="en-US" sz="3200" b="1" dirty="0" smtClean="0"/>
+              <a:rPr lang="ja-JP" altLang="en-US" sz="3200" b="1" dirty="0"/>
               <a:t>●現段階に至るまでにやってきたこと</a:t>
             </a:r>
             <a:endParaRPr kumimoji="1" lang="ja-JP" altLang="en-US" sz="3200" b="1" dirty="0"/>
@@ -3448,10 +3461,9 @@
               <a:t>１</a:t>
             </a:r>
             <a:r>
-              <a:rPr kumimoji="1" lang="ja-JP" altLang="en-US" sz="2400" b="1" dirty="0" smtClean="0"/>
+              <a:rPr kumimoji="1" lang="ja-JP" altLang="en-US" sz="2400" b="1" dirty="0"/>
               <a:t>つ目</a:t>
             </a:r>
-            <a:endParaRPr kumimoji="1" lang="ja-JP" altLang="en-US" sz="2400" b="1" dirty="0"/>
           </a:p>
         </p:txBody>
       </p:sp>
@@ -3478,10 +3490,9 @@
           <a:lstStyle/>
           <a:p>
             <a:r>
-              <a:rPr kumimoji="1" lang="ja-JP" altLang="en-US" sz="2400" b="1" dirty="0" smtClean="0"/>
+              <a:rPr kumimoji="1" lang="ja-JP" altLang="en-US" sz="2400" b="1" dirty="0"/>
               <a:t>四角の左上の頂点を常に基準にして処理を作成</a:t>
             </a:r>
-            <a:endParaRPr kumimoji="1" lang="ja-JP" altLang="en-US" sz="2400" b="1" dirty="0"/>
           </a:p>
         </p:txBody>
       </p:sp>
@@ -3554,7 +3565,7 @@
           <a:lstStyle/>
           <a:p>
             <a:r>
-              <a:rPr kumimoji="1" lang="en-US" altLang="ja-JP" dirty="0" smtClean="0"/>
+              <a:rPr kumimoji="1" lang="en-US" altLang="ja-JP" dirty="0"/>
               <a:t>VW</a:t>
             </a:r>
             <a:endParaRPr kumimoji="1" lang="ja-JP" altLang="en-US" dirty="0"/>
@@ -3584,7 +3595,7 @@
           <a:lstStyle/>
           <a:p>
             <a:r>
-              <a:rPr kumimoji="1" lang="en-US" altLang="ja-JP" dirty="0" smtClean="0"/>
+              <a:rPr kumimoji="1" lang="en-US" altLang="ja-JP" dirty="0"/>
               <a:t>VH</a:t>
             </a:r>
             <a:endParaRPr kumimoji="1" lang="ja-JP" altLang="en-US" dirty="0"/>
@@ -3720,81 +3731,81 @@
           <a:lstStyle/>
           <a:p>
             <a:r>
-              <a:rPr lang="ja-JP" altLang="en-US" b="1" dirty="0" smtClean="0"/>
+              <a:rPr lang="ja-JP" altLang="en-US" b="1" dirty="0"/>
               <a:t>　</a:t>
             </a:r>
             <a:r>
-              <a:rPr lang="en-US" altLang="ja-JP" b="1" dirty="0" smtClean="0"/>
+              <a:rPr lang="en-US" altLang="ja-JP" b="1" dirty="0"/>
               <a:t>float</a:t>
             </a:r>
             <a:r>
-              <a:rPr lang="ja-JP" altLang="en-US" b="1" dirty="0" smtClean="0"/>
+              <a:rPr lang="ja-JP" altLang="en-US" b="1" dirty="0"/>
               <a:t>型で宣言しておいた</a:t>
             </a:r>
             <a:r>
-              <a:rPr lang="en-US" altLang="ja-JP" b="1" dirty="0" smtClean="0"/>
+              <a:rPr lang="en-US" altLang="ja-JP" b="1" dirty="0"/>
               <a:t>r</a:t>
             </a:r>
             <a:r>
-              <a:rPr kumimoji="1" lang="en-US" altLang="ja-JP" b="1" dirty="0" smtClean="0"/>
+              <a:rPr kumimoji="1" lang="en-US" altLang="ja-JP" b="1" dirty="0"/>
               <a:t>adian(</a:t>
             </a:r>
             <a:r>
-              <a:rPr kumimoji="1" lang="ja-JP" altLang="en-US" b="1" dirty="0" smtClean="0"/>
+              <a:rPr kumimoji="1" lang="ja-JP" altLang="en-US" b="1" dirty="0"/>
               <a:t>角度</a:t>
             </a:r>
             <a:r>
-              <a:rPr kumimoji="1" lang="en-US" altLang="ja-JP" b="1" dirty="0" smtClean="0"/>
+              <a:rPr kumimoji="1" lang="en-US" altLang="ja-JP" b="1" dirty="0"/>
               <a:t>)</a:t>
             </a:r>
             <a:r>
-              <a:rPr kumimoji="1" lang="ja-JP" altLang="en-US" b="1" dirty="0" smtClean="0"/>
+              <a:rPr kumimoji="1" lang="ja-JP" altLang="en-US" b="1" dirty="0"/>
               <a:t>を左の図の状態で０にしておき、</a:t>
             </a:r>
-            <a:endParaRPr kumimoji="1" lang="en-US" altLang="ja-JP" b="1" dirty="0" smtClean="0"/>
-          </a:p>
-          <a:p>
-            <a:r>
-              <a:rPr lang="ja-JP" altLang="en-US" b="1" dirty="0" smtClean="0"/>
+            <a:endParaRPr kumimoji="1" lang="en-US" altLang="ja-JP" b="1" dirty="0"/>
+          </a:p>
+          <a:p>
+            <a:r>
+              <a:rPr lang="ja-JP" altLang="en-US" b="1" dirty="0"/>
               <a:t>頂点が当たった場合に</a:t>
             </a:r>
             <a:r>
-              <a:rPr lang="en-US" altLang="ja-JP" b="1" dirty="0" smtClean="0"/>
+              <a:rPr lang="en-US" altLang="ja-JP" b="1" dirty="0"/>
               <a:t>radian</a:t>
             </a:r>
             <a:r>
-              <a:rPr lang="ja-JP" altLang="en-US" b="1" dirty="0" smtClean="0"/>
+              <a:rPr lang="ja-JP" altLang="en-US" b="1" dirty="0"/>
               <a:t>の状態を変える。</a:t>
             </a:r>
-            <a:endParaRPr lang="en-US" altLang="ja-JP" b="1" dirty="0" smtClean="0"/>
-          </a:p>
-          <a:p>
-            <a:r>
-              <a:rPr lang="ja-JP" altLang="en-US" b="1" dirty="0" smtClean="0"/>
+            <a:endParaRPr lang="en-US" altLang="ja-JP" b="1" dirty="0"/>
+          </a:p>
+          <a:p>
+            <a:r>
+              <a:rPr lang="ja-JP" altLang="en-US" b="1" dirty="0"/>
               <a:t>　その後、</a:t>
             </a:r>
             <a:r>
-              <a:rPr lang="en-US" altLang="ja-JP" b="1" dirty="0" smtClean="0"/>
+              <a:rPr lang="en-US" altLang="ja-JP" b="1" dirty="0"/>
               <a:t>radian</a:t>
             </a:r>
             <a:r>
-              <a:rPr lang="ja-JP" altLang="en-US" b="1" dirty="0" smtClean="0"/>
+              <a:rPr lang="ja-JP" altLang="en-US" b="1" dirty="0"/>
               <a:t>の数値を元に</a:t>
             </a:r>
             <a:r>
-              <a:rPr lang="en-US" altLang="ja-JP" b="1" dirty="0" smtClean="0"/>
+              <a:rPr lang="en-US" altLang="ja-JP" b="1" dirty="0"/>
               <a:t>VW</a:t>
             </a:r>
             <a:r>
-              <a:rPr lang="ja-JP" altLang="en-US" b="1" dirty="0" smtClean="0"/>
+              <a:rPr lang="ja-JP" altLang="en-US" b="1" dirty="0"/>
               <a:t>と</a:t>
             </a:r>
             <a:r>
-              <a:rPr lang="en-US" altLang="ja-JP" b="1" dirty="0" smtClean="0"/>
+              <a:rPr lang="en-US" altLang="ja-JP" b="1" dirty="0"/>
               <a:t>VH</a:t>
             </a:r>
             <a:r>
-              <a:rPr lang="ja-JP" altLang="en-US" b="1" dirty="0" smtClean="0"/>
+              <a:rPr lang="ja-JP" altLang="en-US" b="1" dirty="0"/>
               <a:t>を計算し四角の傾きを求めた。</a:t>
             </a:r>
             <a:endParaRPr kumimoji="1" lang="ja-JP" altLang="en-US" b="1" dirty="0"/>
@@ -3824,14 +3835,14 @@
           <a:lstStyle/>
           <a:p>
             <a:r>
-              <a:rPr kumimoji="1" lang="en-US" altLang="ja-JP" b="1" dirty="0" smtClean="0"/>
+              <a:rPr kumimoji="1" lang="en-US" altLang="ja-JP" b="1" dirty="0"/>
               <a:t>※radian </a:t>
             </a:r>
             <a:r>
-              <a:rPr kumimoji="1" lang="ja-JP" altLang="en-US" b="1" dirty="0" smtClean="0"/>
+              <a:rPr kumimoji="1" lang="ja-JP" altLang="en-US" b="1" dirty="0"/>
               <a:t>・・・　角度</a:t>
             </a:r>
-            <a:endParaRPr kumimoji="1" lang="en-US" altLang="ja-JP" b="1" dirty="0" smtClean="0"/>
+            <a:endParaRPr kumimoji="1" lang="en-US" altLang="ja-JP" b="1" dirty="0"/>
           </a:p>
           <a:p>
             <a:r>
@@ -3839,18 +3850,14 @@
               <a:t>　</a:t>
             </a:r>
             <a:r>
-              <a:rPr kumimoji="1" lang="en-US" altLang="ja-JP" b="1" dirty="0" smtClean="0"/>
+              <a:rPr kumimoji="1" lang="en-US" altLang="ja-JP" b="1" dirty="0"/>
               <a:t>VW</a:t>
             </a:r>
             <a:r>
               <a:rPr lang="ja-JP" altLang="en-US" b="1" dirty="0"/>
-              <a:t>　</a:t>
-            </a:r>
-            <a:r>
-              <a:rPr lang="ja-JP" altLang="en-US" b="1" dirty="0" smtClean="0"/>
-              <a:t>  ・・・　横幅のベクトル</a:t>
-            </a:r>
-            <a:endParaRPr lang="en-US" altLang="ja-JP" b="1" dirty="0" smtClean="0"/>
+              <a:t>　  ・・・　横幅のベクトル</a:t>
+            </a:r>
+            <a:endParaRPr lang="en-US" altLang="ja-JP" b="1" dirty="0"/>
           </a:p>
           <a:p>
             <a:r>
@@ -3858,14 +3865,13 @@
               <a:t>　</a:t>
             </a:r>
             <a:r>
-              <a:rPr kumimoji="1" lang="en-US" altLang="ja-JP" b="1" dirty="0" smtClean="0"/>
+              <a:rPr kumimoji="1" lang="en-US" altLang="ja-JP" b="1" dirty="0"/>
               <a:t>VH</a:t>
             </a:r>
             <a:r>
-              <a:rPr kumimoji="1" lang="ja-JP" altLang="en-US" b="1" dirty="0" smtClean="0"/>
+              <a:rPr kumimoji="1" lang="ja-JP" altLang="en-US" b="1" dirty="0"/>
               <a:t>　   ・・・　縦幅のベクトル</a:t>
             </a:r>
-            <a:endParaRPr kumimoji="1" lang="ja-JP" altLang="en-US" b="1" dirty="0"/>
           </a:p>
         </p:txBody>
       </p:sp>
@@ -3892,10 +3898,9 @@
           <a:lstStyle/>
           <a:p>
             <a:r>
-              <a:rPr kumimoji="1" lang="ja-JP" altLang="en-US" sz="2400" b="1" dirty="0" smtClean="0"/>
+              <a:rPr kumimoji="1" lang="ja-JP" altLang="en-US" sz="2400" b="1" dirty="0"/>
               <a:t>・内容</a:t>
             </a:r>
-            <a:endParaRPr kumimoji="1" lang="ja-JP" altLang="en-US" sz="2400" b="1" dirty="0"/>
           </a:p>
         </p:txBody>
       </p:sp>
@@ -3922,24 +3927,23 @@
           <a:lstStyle/>
           <a:p>
             <a:r>
-              <a:rPr lang="ja-JP" altLang="en-US" b="1" dirty="0" smtClean="0"/>
+              <a:rPr lang="ja-JP" altLang="en-US" b="1" dirty="0"/>
               <a:t>　縦幅を大きくしたとき、</a:t>
             </a:r>
-            <a:endParaRPr lang="en-US" altLang="ja-JP" b="1" dirty="0" smtClean="0"/>
-          </a:p>
-          <a:p>
-            <a:r>
-              <a:rPr lang="ja-JP" altLang="en-US" b="1" dirty="0" smtClean="0"/>
+            <a:endParaRPr lang="en-US" altLang="ja-JP" b="1" dirty="0"/>
+          </a:p>
+          <a:p>
+            <a:r>
+              <a:rPr lang="ja-JP" altLang="en-US" b="1" dirty="0"/>
               <a:t>座標や横幅・縦幅ベクトルの情報が飛んでしまった。</a:t>
             </a:r>
-            <a:endParaRPr lang="en-US" altLang="ja-JP" b="1" dirty="0" smtClean="0"/>
-          </a:p>
-          <a:p>
-            <a:r>
-              <a:rPr kumimoji="1" lang="ja-JP" altLang="en-US" b="1" dirty="0" smtClean="0"/>
+            <a:endParaRPr lang="en-US" altLang="ja-JP" b="1" dirty="0"/>
+          </a:p>
+          <a:p>
+            <a:r>
+              <a:rPr kumimoji="1" lang="ja-JP" altLang="en-US" b="1" dirty="0"/>
               <a:t>　また、複数個出した時にも情報が飛んでしまうバグが起きた。</a:t>
             </a:r>
-            <a:endParaRPr kumimoji="1" lang="ja-JP" altLang="en-US" b="1" dirty="0"/>
           </a:p>
         </p:txBody>
       </p:sp>
@@ -3966,10 +3970,9 @@
           <a:lstStyle/>
           <a:p>
             <a:r>
-              <a:rPr kumimoji="1" lang="ja-JP" altLang="en-US" sz="2400" b="1" dirty="0" smtClean="0"/>
+              <a:rPr kumimoji="1" lang="ja-JP" altLang="en-US" sz="2400" b="1" dirty="0"/>
               <a:t>・今回の失敗</a:t>
             </a:r>
-            <a:endParaRPr kumimoji="1" lang="ja-JP" altLang="en-US" sz="2400" b="1" dirty="0"/>
           </a:p>
         </p:txBody>
       </p:sp>
@@ -3997,29 +4000,21 @@
           <a:p>
             <a:r>
               <a:rPr lang="ja-JP" altLang="en-US" b="1" dirty="0"/>
-              <a:t>　</a:t>
-            </a:r>
-            <a:r>
-              <a:rPr lang="ja-JP" altLang="en-US" b="1" dirty="0" smtClean="0"/>
-              <a:t>情報が左上に集結しているため、</a:t>
-            </a:r>
-            <a:endParaRPr lang="en-US" altLang="ja-JP" b="1" dirty="0" smtClean="0"/>
-          </a:p>
-          <a:p>
-            <a:r>
-              <a:rPr lang="ja-JP" altLang="en-US" b="1" dirty="0" smtClean="0"/>
+              <a:t>　情報が左上に集結しているため、</a:t>
+            </a:r>
+            <a:endParaRPr lang="en-US" altLang="ja-JP" b="1" dirty="0"/>
+          </a:p>
+          <a:p>
+            <a:r>
+              <a:rPr lang="ja-JP" altLang="en-US" b="1" dirty="0"/>
               <a:t>条件しだいでは簡単にバグが起こってしまったと考えられる。</a:t>
             </a:r>
-            <a:endParaRPr lang="en-US" altLang="ja-JP" b="1" dirty="0" smtClean="0"/>
+            <a:endParaRPr lang="en-US" altLang="ja-JP" b="1" dirty="0"/>
           </a:p>
           <a:p>
             <a:r>
               <a:rPr lang="ja-JP" altLang="en-US" b="1" dirty="0"/>
-              <a:t>　</a:t>
-            </a:r>
-            <a:r>
-              <a:rPr lang="ja-JP" altLang="en-US" b="1" dirty="0" smtClean="0"/>
-              <a:t>よって、頂点情報だけでも分ける必要があるのではと考えた。</a:t>
+              <a:t>　よって、頂点情報だけでも分ける必要があるのではと考えた。</a:t>
             </a:r>
             <a:endParaRPr lang="en-US" altLang="ja-JP" b="1" dirty="0"/>
           </a:p>
@@ -4048,10 +4043,9 @@
           <a:lstStyle/>
           <a:p>
             <a:r>
-              <a:rPr kumimoji="1" lang="ja-JP" altLang="en-US" sz="2400" b="1" dirty="0" smtClean="0"/>
+              <a:rPr kumimoji="1" lang="ja-JP" altLang="en-US" sz="2400" b="1" dirty="0"/>
               <a:t>・今回の改善点</a:t>
             </a:r>
-            <a:endParaRPr kumimoji="1" lang="ja-JP" altLang="en-US" sz="2400" b="1" dirty="0"/>
           </a:p>
         </p:txBody>
       </p:sp>
@@ -4108,7 +4102,7 @@
           <a:lstStyle/>
           <a:p>
             <a:r>
-              <a:rPr lang="ja-JP" altLang="en-US" sz="3200" b="1" dirty="0" smtClean="0"/>
+              <a:rPr lang="ja-JP" altLang="en-US" sz="3200" b="1" dirty="0"/>
               <a:t>●現段階に至るまでにやってきたこと</a:t>
             </a:r>
             <a:endParaRPr kumimoji="1" lang="ja-JP" altLang="en-US" sz="3200" b="1" dirty="0"/>
@@ -4138,14 +4132,13 @@
           <a:lstStyle/>
           <a:p>
             <a:r>
-              <a:rPr lang="ja-JP" altLang="en-US" sz="2400" b="1" dirty="0" smtClean="0"/>
+              <a:rPr lang="ja-JP" altLang="en-US" sz="2400" b="1" dirty="0"/>
               <a:t>２</a:t>
             </a:r>
             <a:r>
-              <a:rPr kumimoji="1" lang="ja-JP" altLang="en-US" sz="2400" b="1" dirty="0" smtClean="0"/>
+              <a:rPr kumimoji="1" lang="ja-JP" altLang="en-US" sz="2400" b="1" dirty="0"/>
               <a:t>つ目</a:t>
             </a:r>
-            <a:endParaRPr kumimoji="1" lang="ja-JP" altLang="en-US" sz="2400" b="1" dirty="0"/>
           </a:p>
         </p:txBody>
       </p:sp>
@@ -4172,7 +4165,7 @@
           <a:lstStyle/>
           <a:p>
             <a:r>
-              <a:rPr lang="ja-JP" altLang="en-US" sz="2400" b="1" dirty="0" smtClean="0"/>
+              <a:rPr lang="ja-JP" altLang="en-US" sz="2400" b="1" dirty="0"/>
               <a:t>各頂点に座標情報を持たせて処理を作成</a:t>
             </a:r>
             <a:endParaRPr kumimoji="1" lang="ja-JP" altLang="en-US" sz="2400" b="1" dirty="0"/>
@@ -4288,52 +4281,44 @@
           <a:lstStyle/>
           <a:p>
             <a:r>
-              <a:rPr lang="ja-JP" altLang="en-US" b="1" dirty="0" smtClean="0"/>
+              <a:rPr lang="ja-JP" altLang="en-US" b="1" dirty="0"/>
               <a:t>　各頂点の座標を配列で保持しておく。</a:t>
             </a:r>
-            <a:endParaRPr lang="en-US" altLang="ja-JP" b="1" dirty="0" smtClean="0"/>
-          </a:p>
-          <a:p>
-            <a:r>
-              <a:rPr kumimoji="1" lang="ja-JP" altLang="en-US" b="1" dirty="0" smtClean="0"/>
+            <a:endParaRPr lang="en-US" altLang="ja-JP" b="1" dirty="0"/>
+          </a:p>
+          <a:p>
+            <a:r>
+              <a:rPr kumimoji="1" lang="ja-JP" altLang="en-US" b="1" dirty="0"/>
               <a:t>　頂点が当たった場合、</a:t>
             </a:r>
             <a:r>
               <a:rPr lang="ja-JP" altLang="en-US" b="1" dirty="0"/>
-              <a:t>当たった頂点</a:t>
-            </a:r>
-            <a:r>
-              <a:rPr lang="ja-JP" altLang="en-US" b="1" dirty="0" smtClean="0"/>
-              <a:t>を基準に</a:t>
-            </a:r>
-            <a:r>
-              <a:rPr lang="en-US" altLang="ja-JP" b="1" dirty="0" smtClean="0"/>
+              <a:t>当たった頂点を基準に</a:t>
+            </a:r>
+            <a:r>
+              <a:rPr lang="en-US" altLang="ja-JP" b="1" dirty="0"/>
               <a:t>width</a:t>
             </a:r>
             <a:r>
-              <a:rPr lang="ja-JP" altLang="en-US" b="1" dirty="0" smtClean="0"/>
+              <a:rPr lang="ja-JP" altLang="en-US" b="1" dirty="0"/>
               <a:t>や</a:t>
             </a:r>
             <a:r>
-              <a:rPr lang="en-US" altLang="ja-JP" b="1" dirty="0" smtClean="0"/>
+              <a:rPr lang="en-US" altLang="ja-JP" b="1" dirty="0"/>
               <a:t>height</a:t>
             </a:r>
             <a:r>
-              <a:rPr lang="ja-JP" altLang="en-US" b="1" dirty="0" smtClean="0"/>
+              <a:rPr lang="ja-JP" altLang="en-US" b="1" dirty="0"/>
               <a:t>を使って</a:t>
             </a:r>
-            <a:endParaRPr lang="en-US" altLang="ja-JP" b="1" dirty="0" smtClean="0"/>
+            <a:endParaRPr lang="en-US" altLang="ja-JP" b="1" dirty="0"/>
           </a:p>
           <a:p>
             <a:r>
               <a:rPr kumimoji="1" lang="ja-JP" altLang="en-US" b="1" dirty="0"/>
-              <a:t>当たっていない</a:t>
-            </a:r>
-            <a:r>
-              <a:rPr kumimoji="1" lang="ja-JP" altLang="en-US" b="1" dirty="0" smtClean="0"/>
-              <a:t>頂点の座標を調整した。</a:t>
-            </a:r>
-            <a:endParaRPr kumimoji="1" lang="en-US" altLang="ja-JP" b="1" dirty="0" smtClean="0"/>
+              <a:t>当たっていない頂点の座標を調整した。</a:t>
+            </a:r>
+            <a:endParaRPr kumimoji="1" lang="en-US" altLang="ja-JP" b="1" dirty="0"/>
           </a:p>
         </p:txBody>
       </p:sp>
@@ -4360,18 +4345,18 @@
           <a:lstStyle/>
           <a:p>
             <a:r>
-              <a:rPr kumimoji="1" lang="en-US" altLang="ja-JP" b="1" dirty="0" smtClean="0"/>
+              <a:rPr kumimoji="1" lang="en-US" altLang="ja-JP" b="1" dirty="0"/>
               <a:t>※</a:t>
             </a:r>
             <a:r>
-              <a:rPr lang="en-US" altLang="ja-JP" b="1" dirty="0" smtClean="0"/>
+              <a:rPr lang="en-US" altLang="ja-JP" b="1" dirty="0"/>
               <a:t>width</a:t>
             </a:r>
             <a:r>
-              <a:rPr lang="ja-JP" altLang="en-US" b="1" dirty="0" smtClean="0"/>
+              <a:rPr lang="ja-JP" altLang="en-US" b="1" dirty="0"/>
               <a:t>   ・・・　横幅</a:t>
             </a:r>
-            <a:endParaRPr lang="en-US" altLang="ja-JP" b="1" dirty="0" smtClean="0"/>
+            <a:endParaRPr lang="en-US" altLang="ja-JP" b="1" dirty="0"/>
           </a:p>
           <a:p>
             <a:r>
@@ -4379,14 +4364,13 @@
               <a:t>　</a:t>
             </a:r>
             <a:r>
-              <a:rPr kumimoji="1" lang="en-US" altLang="ja-JP" b="1" dirty="0" smtClean="0"/>
+              <a:rPr kumimoji="1" lang="en-US" altLang="ja-JP" b="1" dirty="0"/>
               <a:t>height</a:t>
             </a:r>
             <a:r>
-              <a:rPr kumimoji="1" lang="ja-JP" altLang="en-US" b="1" dirty="0" smtClean="0"/>
+              <a:rPr kumimoji="1" lang="ja-JP" altLang="en-US" b="1" dirty="0"/>
               <a:t>  ・・・　縦幅</a:t>
             </a:r>
-            <a:endParaRPr kumimoji="1" lang="ja-JP" altLang="en-US" b="1" dirty="0"/>
           </a:p>
         </p:txBody>
       </p:sp>
@@ -4413,10 +4397,9 @@
           <a:lstStyle/>
           <a:p>
             <a:r>
-              <a:rPr kumimoji="1" lang="ja-JP" altLang="en-US" sz="2400" b="1" dirty="0" smtClean="0"/>
+              <a:rPr kumimoji="1" lang="ja-JP" altLang="en-US" sz="2400" b="1" dirty="0"/>
               <a:t>・内容</a:t>
             </a:r>
-            <a:endParaRPr kumimoji="1" lang="ja-JP" altLang="en-US" sz="2400" b="1" dirty="0"/>
           </a:p>
         </p:txBody>
       </p:sp>
@@ -4443,19 +4426,15 @@
           <a:lstStyle/>
           <a:p>
             <a:r>
-              <a:rPr lang="ja-JP" altLang="en-US" b="1" dirty="0" smtClean="0"/>
+              <a:rPr lang="ja-JP" altLang="en-US" b="1" dirty="0"/>
               <a:t>　角度の情報がないため、座標がそれぞれの位置で調整される。</a:t>
             </a:r>
-            <a:endParaRPr lang="en-US" altLang="ja-JP" b="1" dirty="0" smtClean="0"/>
+            <a:endParaRPr lang="en-US" altLang="ja-JP" b="1" dirty="0"/>
           </a:p>
           <a:p>
             <a:r>
               <a:rPr lang="ja-JP" altLang="en-US" b="1" dirty="0"/>
-              <a:t>　</a:t>
-            </a:r>
-            <a:r>
-              <a:rPr lang="ja-JP" altLang="en-US" b="1" dirty="0" smtClean="0"/>
-              <a:t>その結果、四角の形が崩れて最終的に１本の線になってしまった。</a:t>
+              <a:t>　その結果、四角の形が崩れて最終的に１本の線になってしまった。</a:t>
             </a:r>
             <a:endParaRPr kumimoji="1" lang="ja-JP" altLang="en-US" b="1" dirty="0"/>
           </a:p>
@@ -4484,10 +4463,9 @@
           <a:lstStyle/>
           <a:p>
             <a:r>
-              <a:rPr kumimoji="1" lang="ja-JP" altLang="en-US" sz="2400" b="1" dirty="0" smtClean="0"/>
+              <a:rPr kumimoji="1" lang="ja-JP" altLang="en-US" sz="2400" b="1" dirty="0"/>
               <a:t>・今回の失敗</a:t>
             </a:r>
-            <a:endParaRPr kumimoji="1" lang="ja-JP" altLang="en-US" sz="2400" b="1" dirty="0"/>
           </a:p>
         </p:txBody>
       </p:sp>
@@ -4515,35 +4493,27 @@
           <a:p>
             <a:r>
               <a:rPr lang="ja-JP" altLang="en-US" b="1" dirty="0"/>
-              <a:t>　</a:t>
-            </a:r>
-            <a:r>
-              <a:rPr lang="ja-JP" altLang="en-US" b="1" dirty="0" smtClean="0"/>
-              <a:t>角度の情報がなかったことで形を整えることができなかったので、</a:t>
-            </a:r>
-            <a:endParaRPr lang="en-US" altLang="ja-JP" b="1" dirty="0" smtClean="0"/>
-          </a:p>
-          <a:p>
-            <a:r>
-              <a:rPr lang="ja-JP" altLang="en-US" b="1" dirty="0" smtClean="0"/>
+              <a:t>　角度の情報がなかったことで形を整えることができなかったので、</a:t>
+            </a:r>
+            <a:endParaRPr lang="en-US" altLang="ja-JP" b="1" dirty="0"/>
+          </a:p>
+          <a:p>
+            <a:r>
+              <a:rPr lang="ja-JP" altLang="en-US" b="1" dirty="0"/>
               <a:t>基準自体は作る必要があるのではと考えた。</a:t>
             </a:r>
-            <a:endParaRPr lang="en-US" altLang="ja-JP" b="1" dirty="0" smtClean="0"/>
+            <a:endParaRPr lang="en-US" altLang="ja-JP" b="1" dirty="0"/>
           </a:p>
           <a:p>
             <a:r>
               <a:rPr lang="ja-JP" altLang="en-US" b="1" dirty="0"/>
-              <a:t>　</a:t>
-            </a:r>
-            <a:r>
-              <a:rPr lang="ja-JP" altLang="en-US" b="1" dirty="0" smtClean="0"/>
-              <a:t>ただ、基準だけにすべての情報を持たせると前回と同じになるので</a:t>
-            </a:r>
-            <a:endParaRPr lang="en-US" altLang="ja-JP" b="1" dirty="0" smtClean="0"/>
-          </a:p>
-          <a:p>
-            <a:r>
-              <a:rPr lang="ja-JP" altLang="en-US" b="1" dirty="0" smtClean="0"/>
+              <a:t>　ただ、基準だけにすべての情報を持たせると前回と同じになるので</a:t>
+            </a:r>
+            <a:endParaRPr lang="en-US" altLang="ja-JP" b="1" dirty="0"/>
+          </a:p>
+          <a:p>
+            <a:r>
+              <a:rPr lang="ja-JP" altLang="en-US" b="1" dirty="0"/>
               <a:t>基準を元に少し情報を分ける方法を考えた。</a:t>
             </a:r>
             <a:endParaRPr lang="en-US" altLang="ja-JP" b="1" dirty="0"/>
@@ -4573,10 +4543,9 @@
           <a:lstStyle/>
           <a:p>
             <a:r>
-              <a:rPr kumimoji="1" lang="ja-JP" altLang="en-US" sz="2400" b="1" dirty="0" smtClean="0"/>
+              <a:rPr kumimoji="1" lang="ja-JP" altLang="en-US" sz="2400" b="1" dirty="0"/>
               <a:t>・今回の改善点</a:t>
             </a:r>
-            <a:endParaRPr kumimoji="1" lang="ja-JP" altLang="en-US" sz="2400" b="1" dirty="0"/>
           </a:p>
         </p:txBody>
       </p:sp>
@@ -4793,7 +4762,7 @@
               <a:t>w</a:t>
             </a:r>
             <a:r>
-              <a:rPr kumimoji="1" lang="en-US" altLang="ja-JP" dirty="0" smtClean="0"/>
+              <a:rPr kumimoji="1" lang="en-US" altLang="ja-JP" dirty="0"/>
               <a:t>idth</a:t>
             </a:r>
           </a:p>
@@ -4822,7 +4791,7 @@
           <a:lstStyle/>
           <a:p>
             <a:r>
-              <a:rPr lang="en-US" altLang="ja-JP" dirty="0" smtClean="0"/>
+              <a:rPr lang="en-US" altLang="ja-JP" dirty="0"/>
               <a:t>height</a:t>
             </a:r>
             <a:endParaRPr kumimoji="1" lang="ja-JP" altLang="en-US" dirty="0"/>
@@ -4847,7 +4816,13 @@
   <p:cSld>
     <p:spTree>
       <p:nvGrpSpPr>
-        <p:cNvPr id="1" name=""/>
+        <p:cNvPr id="1" name="">
+          <a:extLst>
+            <a:ext uri="{FF2B5EF4-FFF2-40B4-BE49-F238E27FC236}">
+              <a16:creationId xmlns:a16="http://schemas.microsoft.com/office/drawing/2014/main" id="{8359E660-FF2B-1274-4FC7-5834576A975C}"/>
+            </a:ext>
+          </a:extLst>
+        </p:cNvPr>
         <p:cNvGrpSpPr/>
         <p:nvPr/>
       </p:nvGrpSpPr>
@@ -4861,7 +4836,13 @@
       </p:grpSpPr>
       <p:sp>
         <p:nvSpPr>
-          <p:cNvPr id="5" name="テキスト ボックス 4"/>
+          <p:cNvPr id="5" name="テキスト ボックス 4">
+            <a:extLst>
+              <a:ext uri="{FF2B5EF4-FFF2-40B4-BE49-F238E27FC236}">
+                <a16:creationId xmlns:a16="http://schemas.microsoft.com/office/drawing/2014/main" id="{D5BF3FA0-61EB-FC6B-AF3B-74BFEAC53680}"/>
+              </a:ext>
+            </a:extLst>
+          </p:cNvPr>
           <p:cNvSpPr txBox="1"/>
           <p:nvPr/>
         </p:nvSpPr>
@@ -4882,7 +4863,7 @@
           <a:lstStyle/>
           <a:p>
             <a:r>
-              <a:rPr lang="ja-JP" altLang="en-US" sz="3200" b="1" dirty="0" smtClean="0"/>
+              <a:rPr lang="ja-JP" altLang="en-US" sz="3200" b="1" dirty="0"/>
               <a:t>●現段階に至るまでにやってきたこと</a:t>
             </a:r>
             <a:endParaRPr kumimoji="1" lang="ja-JP" altLang="en-US" sz="3200" b="1" dirty="0"/>
@@ -4891,7 +4872,13 @@
       </p:sp>
       <p:sp>
         <p:nvSpPr>
-          <p:cNvPr id="6" name="テキスト ボックス 5"/>
+          <p:cNvPr id="6" name="テキスト ボックス 5">
+            <a:extLst>
+              <a:ext uri="{FF2B5EF4-FFF2-40B4-BE49-F238E27FC236}">
+                <a16:creationId xmlns:a16="http://schemas.microsoft.com/office/drawing/2014/main" id="{27CF3027-6622-2AC9-6958-31E6DB481AD2}"/>
+              </a:ext>
+            </a:extLst>
+          </p:cNvPr>
           <p:cNvSpPr txBox="1"/>
           <p:nvPr/>
         </p:nvSpPr>
@@ -4916,16 +4903,21 @@
               <a:t>３</a:t>
             </a:r>
             <a:r>
-              <a:rPr kumimoji="1" lang="ja-JP" altLang="en-US" sz="2400" b="1" dirty="0" smtClean="0"/>
+              <a:rPr kumimoji="1" lang="ja-JP" altLang="en-US" sz="2400" b="1" dirty="0"/>
               <a:t>つ目</a:t>
             </a:r>
-            <a:endParaRPr kumimoji="1" lang="ja-JP" altLang="en-US" sz="2400" b="1" dirty="0"/>
-          </a:p>
-        </p:txBody>
-      </p:sp>
-      <p:sp>
-        <p:nvSpPr>
-          <p:cNvPr id="7" name="テキスト ボックス 6"/>
+          </a:p>
+        </p:txBody>
+      </p:sp>
+      <p:sp>
+        <p:nvSpPr>
+          <p:cNvPr id="7" name="テキスト ボックス 6">
+            <a:extLst>
+              <a:ext uri="{FF2B5EF4-FFF2-40B4-BE49-F238E27FC236}">
+                <a16:creationId xmlns:a16="http://schemas.microsoft.com/office/drawing/2014/main" id="{44D35B9C-58B3-59C0-7D2D-1025B4A10564}"/>
+              </a:ext>
+            </a:extLst>
+          </p:cNvPr>
           <p:cNvSpPr txBox="1"/>
           <p:nvPr/>
         </p:nvSpPr>
@@ -4946,27 +4938,19 @@
           <a:lstStyle/>
           <a:p>
             <a:r>
-              <a:rPr lang="ja-JP" altLang="en-US" sz="2400" b="1" dirty="0" smtClean="0"/>
-              <a:t>各頂点の座標を中心座標を</a:t>
-            </a:r>
-            <a:r>
               <a:rPr lang="ja-JP" altLang="en-US" sz="2400" b="1" dirty="0"/>
-              <a:t>基準</a:t>
-            </a:r>
-            <a:r>
-              <a:rPr lang="ja-JP" altLang="en-US" sz="2400" b="1" dirty="0" smtClean="0"/>
-              <a:t>に配列で保持し、処理を作成</a:t>
-            </a:r>
-            <a:r>
-              <a:rPr lang="en-US" altLang="ja-JP" sz="2400" b="1" dirty="0" smtClean="0"/>
+              <a:t>各頂点の座標を中心座標を基準に配列で保持し、処理を作成</a:t>
+            </a:r>
+            <a:r>
+              <a:rPr lang="en-US" altLang="ja-JP" sz="2400" b="1" dirty="0"/>
               <a:t>(</a:t>
             </a:r>
             <a:r>
-              <a:rPr lang="ja-JP" altLang="en-US" sz="2400" b="1" dirty="0" smtClean="0"/>
+              <a:rPr lang="ja-JP" altLang="en-US" sz="2400" b="1" dirty="0"/>
               <a:t>現在の状況</a:t>
             </a:r>
             <a:r>
-              <a:rPr lang="en-US" altLang="ja-JP" sz="2400" b="1" dirty="0" smtClean="0"/>
+              <a:rPr lang="en-US" altLang="ja-JP" sz="2400" b="1" dirty="0"/>
               <a:t>)</a:t>
             </a:r>
             <a:endParaRPr kumimoji="1" lang="ja-JP" altLang="en-US" sz="2400" b="1" dirty="0"/>
@@ -4975,7 +4959,13 @@
       </p:sp>
       <p:sp>
         <p:nvSpPr>
-          <p:cNvPr id="40" name="正方形/長方形 39"/>
+          <p:cNvPr id="40" name="正方形/長方形 39">
+            <a:extLst>
+              <a:ext uri="{FF2B5EF4-FFF2-40B4-BE49-F238E27FC236}">
+                <a16:creationId xmlns:a16="http://schemas.microsoft.com/office/drawing/2014/main" id="{023220BE-AED6-4F88-191C-428955B08505}"/>
+              </a:ext>
+            </a:extLst>
+          </p:cNvPr>
           <p:cNvSpPr/>
           <p:nvPr/>
         </p:nvSpPr>
@@ -5021,7 +5011,13 @@
       </p:sp>
       <p:sp>
         <p:nvSpPr>
-          <p:cNvPr id="43" name="楕円 42"/>
+          <p:cNvPr id="43" name="楕円 42">
+            <a:extLst>
+              <a:ext uri="{FF2B5EF4-FFF2-40B4-BE49-F238E27FC236}">
+                <a16:creationId xmlns:a16="http://schemas.microsoft.com/office/drawing/2014/main" id="{6C2CCFB5-16CE-5C72-8AC6-55A5A9B470CC}"/>
+              </a:ext>
+            </a:extLst>
+          </p:cNvPr>
           <p:cNvSpPr/>
           <p:nvPr/>
         </p:nvSpPr>
@@ -5061,7 +5057,13 @@
       </p:sp>
       <p:sp>
         <p:nvSpPr>
-          <p:cNvPr id="50" name="テキスト ボックス 49"/>
+          <p:cNvPr id="50" name="テキスト ボックス 49">
+            <a:extLst>
+              <a:ext uri="{FF2B5EF4-FFF2-40B4-BE49-F238E27FC236}">
+                <a16:creationId xmlns:a16="http://schemas.microsoft.com/office/drawing/2014/main" id="{4E47C6E4-C4AD-C05F-2D93-6C25DB914AC9}"/>
+              </a:ext>
+            </a:extLst>
+          </p:cNvPr>
           <p:cNvSpPr txBox="1"/>
           <p:nvPr/>
         </p:nvSpPr>
@@ -5082,42 +5084,44 @@
           <a:lstStyle/>
           <a:p>
             <a:r>
-              <a:rPr lang="ja-JP" altLang="en-US" b="1" dirty="0" smtClean="0"/>
+              <a:rPr lang="ja-JP" altLang="en-US" b="1" dirty="0"/>
               <a:t>　中心座標を</a:t>
             </a:r>
             <a:r>
-              <a:rPr lang="en-US" altLang="ja-JP" b="1" dirty="0" smtClean="0"/>
+              <a:rPr lang="en-US" altLang="ja-JP" b="1" dirty="0"/>
               <a:t>(0,0)</a:t>
             </a:r>
             <a:r>
-              <a:rPr lang="ja-JP" altLang="en-US" b="1" dirty="0" smtClean="0"/>
+              <a:rPr lang="ja-JP" altLang="en-US" b="1" dirty="0"/>
               <a:t>としたときの各頂点の座標をベクトル配列で保持した。</a:t>
             </a:r>
-            <a:endParaRPr lang="en-US" altLang="ja-JP" b="1" dirty="0" smtClean="0"/>
+            <a:endParaRPr lang="en-US" altLang="ja-JP" b="1" dirty="0"/>
           </a:p>
           <a:p>
             <a:r>
               <a:rPr kumimoji="1" lang="ja-JP" altLang="en-US" b="1" dirty="0"/>
-              <a:t>　</a:t>
-            </a:r>
-            <a:r>
-              <a:rPr kumimoji="1" lang="ja-JP" altLang="en-US" b="1" dirty="0" smtClean="0"/>
-              <a:t>その後、頂点が当たった場合に当たった頂点のみを当たった位置まで戻し、</a:t>
-            </a:r>
-            <a:endParaRPr kumimoji="1" lang="en-US" altLang="ja-JP" b="1" dirty="0" smtClean="0"/>
-          </a:p>
-          <a:p>
-            <a:r>
-              <a:rPr kumimoji="1" lang="ja-JP" altLang="en-US" b="1" dirty="0" smtClean="0"/>
+              <a:t>　その後、頂点が当たった場合に当たった頂点のみを当たった位置まで戻し、</a:t>
+            </a:r>
+            <a:endParaRPr kumimoji="1" lang="en-US" altLang="ja-JP" b="1" dirty="0"/>
+          </a:p>
+          <a:p>
+            <a:r>
+              <a:rPr kumimoji="1" lang="ja-JP" altLang="en-US" b="1" dirty="0"/>
               <a:t>その頂点から中心座標を調整してからすべての頂点に適応させた。</a:t>
             </a:r>
-            <a:endParaRPr kumimoji="1" lang="en-US" altLang="ja-JP" b="1" dirty="0" smtClean="0"/>
-          </a:p>
-        </p:txBody>
-      </p:sp>
-      <p:sp>
-        <p:nvSpPr>
-          <p:cNvPr id="52" name="テキスト ボックス 51"/>
+            <a:endParaRPr kumimoji="1" lang="en-US" altLang="ja-JP" b="1" dirty="0"/>
+          </a:p>
+        </p:txBody>
+      </p:sp>
+      <p:sp>
+        <p:nvSpPr>
+          <p:cNvPr id="52" name="テキスト ボックス 51">
+            <a:extLst>
+              <a:ext uri="{FF2B5EF4-FFF2-40B4-BE49-F238E27FC236}">
+                <a16:creationId xmlns:a16="http://schemas.microsoft.com/office/drawing/2014/main" id="{A3EAE10C-9CBC-CF1A-F587-8534A0F6837C}"/>
+              </a:ext>
+            </a:extLst>
+          </p:cNvPr>
           <p:cNvSpPr txBox="1"/>
           <p:nvPr/>
         </p:nvSpPr>
@@ -5138,23 +5142,28 @@
           <a:lstStyle/>
           <a:p>
             <a:r>
-              <a:rPr kumimoji="1" lang="ja-JP" altLang="en-US" sz="2400" b="1" dirty="0" smtClean="0"/>
+              <a:rPr kumimoji="1" lang="ja-JP" altLang="en-US" sz="2400" b="1" dirty="0"/>
               <a:t>・内容</a:t>
             </a:r>
-            <a:endParaRPr kumimoji="1" lang="ja-JP" altLang="en-US" sz="2400" b="1" dirty="0"/>
-          </a:p>
-        </p:txBody>
-      </p:sp>
-      <p:sp>
-        <p:nvSpPr>
-          <p:cNvPr id="54" name="テキスト ボックス 53"/>
+          </a:p>
+        </p:txBody>
+      </p:sp>
+      <p:sp>
+        <p:nvSpPr>
+          <p:cNvPr id="54" name="テキスト ボックス 53">
+            <a:extLst>
+              <a:ext uri="{FF2B5EF4-FFF2-40B4-BE49-F238E27FC236}">
+                <a16:creationId xmlns:a16="http://schemas.microsoft.com/office/drawing/2014/main" id="{A4F2F1D3-2AB3-82DA-BFB6-89F0C1939918}"/>
+              </a:ext>
+            </a:extLst>
+          </p:cNvPr>
           <p:cNvSpPr txBox="1"/>
           <p:nvPr/>
         </p:nvSpPr>
         <p:spPr>
           <a:xfrm>
             <a:off x="4372505" y="3757766"/>
-            <a:ext cx="5493812" cy="646331"/>
+            <a:ext cx="5032147" cy="646331"/>
           </a:xfrm>
           <a:prstGeom prst="rect">
             <a:avLst/>
@@ -5168,15 +5177,19 @@
           <a:lstStyle/>
           <a:p>
             <a:r>
+              <a:rPr lang="ja-JP" altLang="en-US" b="1" dirty="0"/>
+              <a:t>　</a:t>
+            </a:r>
+            <a:r>
               <a:rPr lang="ja-JP" altLang="en-US" b="1" dirty="0" smtClean="0"/>
-              <a:t>　角速度の情報がないため、箱がぶら下がった時に</a:t>
+              <a:t>各頂点で毎度座標を計算しているので、</a:t>
             </a:r>
             <a:endParaRPr lang="en-US" altLang="ja-JP" b="1" dirty="0" smtClean="0"/>
           </a:p>
           <a:p>
             <a:r>
               <a:rPr lang="ja-JP" altLang="en-US" b="1" dirty="0" smtClean="0"/>
-              <a:t>真下の状態で急に停止してしまう。</a:t>
+              <a:t>四角に当たった時に揺れが発生してしまった。</a:t>
             </a:r>
             <a:endParaRPr kumimoji="1" lang="ja-JP" altLang="en-US" b="1" dirty="0"/>
           </a:p>
@@ -5184,7 +5197,13 @@
       </p:sp>
       <p:sp>
         <p:nvSpPr>
-          <p:cNvPr id="55" name="テキスト ボックス 54"/>
+          <p:cNvPr id="55" name="テキスト ボックス 54">
+            <a:extLst>
+              <a:ext uri="{FF2B5EF4-FFF2-40B4-BE49-F238E27FC236}">
+                <a16:creationId xmlns:a16="http://schemas.microsoft.com/office/drawing/2014/main" id="{91E19C51-0842-A9EF-71D8-DED802F2EDE1}"/>
+              </a:ext>
+            </a:extLst>
+          </p:cNvPr>
           <p:cNvSpPr txBox="1"/>
           <p:nvPr/>
         </p:nvSpPr>
@@ -5205,23 +5224,28 @@
           <a:lstStyle/>
           <a:p>
             <a:r>
-              <a:rPr kumimoji="1" lang="ja-JP" altLang="en-US" sz="2400" b="1" dirty="0" smtClean="0"/>
+              <a:rPr kumimoji="1" lang="ja-JP" altLang="en-US" sz="2400" b="1" dirty="0"/>
               <a:t>・今回の失敗</a:t>
             </a:r>
-            <a:endParaRPr kumimoji="1" lang="ja-JP" altLang="en-US" sz="2400" b="1" dirty="0"/>
-          </a:p>
-        </p:txBody>
-      </p:sp>
-      <p:sp>
-        <p:nvSpPr>
-          <p:cNvPr id="56" name="テキスト ボックス 55"/>
+          </a:p>
+        </p:txBody>
+      </p:sp>
+      <p:sp>
+        <p:nvSpPr>
+          <p:cNvPr id="56" name="テキスト ボックス 55">
+            <a:extLst>
+              <a:ext uri="{FF2B5EF4-FFF2-40B4-BE49-F238E27FC236}">
+                <a16:creationId xmlns:a16="http://schemas.microsoft.com/office/drawing/2014/main" id="{B71B8581-1983-42D0-9AD0-3E826B628190}"/>
+              </a:ext>
+            </a:extLst>
+          </p:cNvPr>
           <p:cNvSpPr txBox="1"/>
           <p:nvPr/>
         </p:nvSpPr>
         <p:spPr>
           <a:xfrm>
             <a:off x="4393345" y="4987863"/>
-            <a:ext cx="6647974" cy="923330"/>
+            <a:ext cx="6186309" cy="923330"/>
           </a:xfrm>
           <a:prstGeom prst="rect">
             <a:avLst/>
@@ -5235,26 +5259,22 @@
           <a:lstStyle/>
           <a:p>
             <a:r>
-              <a:rPr lang="ja-JP" altLang="en-US" b="1" dirty="0"/>
-              <a:t>　</a:t>
-            </a:r>
-            <a:r>
               <a:rPr lang="ja-JP" altLang="en-US" b="1" dirty="0" smtClean="0"/>
-              <a:t>回転させるための考え方は間違えてはいないと思った。</a:t>
+              <a:t>　当たった瞬間に計算して適応させていたので、</a:t>
             </a:r>
             <a:endParaRPr lang="en-US" altLang="ja-JP" b="1" dirty="0" smtClean="0"/>
           </a:p>
           <a:p>
             <a:r>
               <a:rPr lang="ja-JP" altLang="en-US" b="1" dirty="0" smtClean="0"/>
-              <a:t>　なので、ここから角速度を求めるということと、</a:t>
+              <a:t>当たったら一度各頂点で当たっているか全て計算してから</a:t>
             </a:r>
             <a:endParaRPr lang="en-US" altLang="ja-JP" b="1" dirty="0" smtClean="0"/>
           </a:p>
           <a:p>
             <a:r>
               <a:rPr lang="ja-JP" altLang="en-US" b="1" dirty="0" smtClean="0"/>
-              <a:t>角速度を四角の回転に適応させる方法を考えないといけない。</a:t>
+              <a:t>適応させようと考えた。</a:t>
             </a:r>
             <a:endParaRPr lang="en-US" altLang="ja-JP" b="1" dirty="0"/>
           </a:p>
@@ -5262,7 +5282,13 @@
       </p:sp>
       <p:sp>
         <p:nvSpPr>
-          <p:cNvPr id="57" name="テキスト ボックス 56"/>
+          <p:cNvPr id="57" name="テキスト ボックス 56">
+            <a:extLst>
+              <a:ext uri="{FF2B5EF4-FFF2-40B4-BE49-F238E27FC236}">
+                <a16:creationId xmlns:a16="http://schemas.microsoft.com/office/drawing/2014/main" id="{64741C03-5E1A-755F-6DCA-F47AC9769560}"/>
+              </a:ext>
+            </a:extLst>
+          </p:cNvPr>
           <p:cNvSpPr txBox="1"/>
           <p:nvPr/>
         </p:nvSpPr>
@@ -5283,16 +5309,21 @@
           <a:lstStyle/>
           <a:p>
             <a:r>
-              <a:rPr kumimoji="1" lang="ja-JP" altLang="en-US" sz="2400" b="1" dirty="0" smtClean="0"/>
+              <a:rPr kumimoji="1" lang="ja-JP" altLang="en-US" sz="2400" b="1" dirty="0"/>
               <a:t>・今回の改善点</a:t>
             </a:r>
-            <a:endParaRPr kumimoji="1" lang="ja-JP" altLang="en-US" sz="2400" b="1" dirty="0"/>
-          </a:p>
-        </p:txBody>
-      </p:sp>
-      <p:sp>
-        <p:nvSpPr>
-          <p:cNvPr id="18" name="楕円 17"/>
+          </a:p>
+        </p:txBody>
+      </p:sp>
+      <p:sp>
+        <p:nvSpPr>
+          <p:cNvPr id="18" name="楕円 17">
+            <a:extLst>
+              <a:ext uri="{FF2B5EF4-FFF2-40B4-BE49-F238E27FC236}">
+                <a16:creationId xmlns:a16="http://schemas.microsoft.com/office/drawing/2014/main" id="{DA7A6919-1356-ED2E-FBBA-E9E66BFBAC6C}"/>
+              </a:ext>
+            </a:extLst>
+          </p:cNvPr>
           <p:cNvSpPr/>
           <p:nvPr/>
         </p:nvSpPr>
@@ -5332,7 +5363,13 @@
       </p:sp>
       <p:sp>
         <p:nvSpPr>
-          <p:cNvPr id="19" name="楕円 18"/>
+          <p:cNvPr id="19" name="楕円 18">
+            <a:extLst>
+              <a:ext uri="{FF2B5EF4-FFF2-40B4-BE49-F238E27FC236}">
+                <a16:creationId xmlns:a16="http://schemas.microsoft.com/office/drawing/2014/main" id="{F0220D08-F4D7-E8A7-91B2-2D53B10A3113}"/>
+              </a:ext>
+            </a:extLst>
+          </p:cNvPr>
           <p:cNvSpPr/>
           <p:nvPr/>
         </p:nvSpPr>
@@ -5372,7 +5409,13 @@
       </p:sp>
       <p:sp>
         <p:nvSpPr>
-          <p:cNvPr id="20" name="楕円 19"/>
+          <p:cNvPr id="20" name="楕円 19">
+            <a:extLst>
+              <a:ext uri="{FF2B5EF4-FFF2-40B4-BE49-F238E27FC236}">
+                <a16:creationId xmlns:a16="http://schemas.microsoft.com/office/drawing/2014/main" id="{7E3723EC-8324-31CD-C42A-318C4AAF1EFB}"/>
+              </a:ext>
+            </a:extLst>
+          </p:cNvPr>
           <p:cNvSpPr/>
           <p:nvPr/>
         </p:nvSpPr>
@@ -5412,7 +5455,13 @@
       </p:sp>
       <p:cxnSp>
         <p:nvCxnSpPr>
-          <p:cNvPr id="24" name="直線矢印コネクタ 23"/>
+          <p:cNvPr id="24" name="直線矢印コネクタ 23">
+            <a:extLst>
+              <a:ext uri="{FF2B5EF4-FFF2-40B4-BE49-F238E27FC236}">
+                <a16:creationId xmlns:a16="http://schemas.microsoft.com/office/drawing/2014/main" id="{B6C291C5-1108-BD26-D6F9-72C63CBBD306}"/>
+              </a:ext>
+            </a:extLst>
+          </p:cNvPr>
           <p:cNvCxnSpPr>
             <a:stCxn id="21" idx="6"/>
             <a:endCxn id="40" idx="3"/>
@@ -5448,7 +5497,13 @@
       </p:cxnSp>
       <p:cxnSp>
         <p:nvCxnSpPr>
-          <p:cNvPr id="25" name="直線矢印コネクタ 24"/>
+          <p:cNvPr id="25" name="直線矢印コネクタ 24">
+            <a:extLst>
+              <a:ext uri="{FF2B5EF4-FFF2-40B4-BE49-F238E27FC236}">
+                <a16:creationId xmlns:a16="http://schemas.microsoft.com/office/drawing/2014/main" id="{68647A28-69ED-9E6C-4411-109A7CF038D5}"/>
+              </a:ext>
+            </a:extLst>
+          </p:cNvPr>
           <p:cNvCxnSpPr>
             <a:endCxn id="40" idx="2"/>
           </p:cNvCxnSpPr>
@@ -5483,7 +5538,13 @@
       </p:cxnSp>
       <p:sp>
         <p:nvSpPr>
-          <p:cNvPr id="26" name="テキスト ボックス 25"/>
+          <p:cNvPr id="26" name="テキスト ボックス 25">
+            <a:extLst>
+              <a:ext uri="{FF2B5EF4-FFF2-40B4-BE49-F238E27FC236}">
+                <a16:creationId xmlns:a16="http://schemas.microsoft.com/office/drawing/2014/main" id="{1361A7C6-7A1E-6687-0F25-CB5AC42043CC}"/>
+              </a:ext>
+            </a:extLst>
+          </p:cNvPr>
           <p:cNvSpPr txBox="1"/>
           <p:nvPr/>
         </p:nvSpPr>
@@ -5504,7 +5565,7 @@
           <a:lstStyle/>
           <a:p>
             <a:r>
-              <a:rPr kumimoji="1" lang="en-US" altLang="ja-JP" dirty="0" smtClean="0"/>
+              <a:rPr kumimoji="1" lang="en-US" altLang="ja-JP" dirty="0"/>
               <a:t>VW</a:t>
             </a:r>
           </a:p>
@@ -5512,7 +5573,13 @@
       </p:sp>
       <p:sp>
         <p:nvSpPr>
-          <p:cNvPr id="27" name="テキスト ボックス 26"/>
+          <p:cNvPr id="27" name="テキスト ボックス 26">
+            <a:extLst>
+              <a:ext uri="{FF2B5EF4-FFF2-40B4-BE49-F238E27FC236}">
+                <a16:creationId xmlns:a16="http://schemas.microsoft.com/office/drawing/2014/main" id="{7897CFE5-2457-F979-A432-1F6C08C593C1}"/>
+              </a:ext>
+            </a:extLst>
+          </p:cNvPr>
           <p:cNvSpPr txBox="1"/>
           <p:nvPr/>
         </p:nvSpPr>
@@ -5533,7 +5600,7 @@
           <a:lstStyle/>
           <a:p>
             <a:r>
-              <a:rPr lang="en-US" altLang="ja-JP" dirty="0" smtClean="0"/>
+              <a:rPr lang="en-US" altLang="ja-JP" dirty="0"/>
               <a:t>VH</a:t>
             </a:r>
             <a:endParaRPr kumimoji="1" lang="ja-JP" altLang="en-US" dirty="0"/>
@@ -5542,7 +5609,13 @@
       </p:sp>
       <p:sp>
         <p:nvSpPr>
-          <p:cNvPr id="21" name="楕円 20"/>
+          <p:cNvPr id="21" name="楕円 20">
+            <a:extLst>
+              <a:ext uri="{FF2B5EF4-FFF2-40B4-BE49-F238E27FC236}">
+                <a16:creationId xmlns:a16="http://schemas.microsoft.com/office/drawing/2014/main" id="{54204B01-A889-7E56-A5EF-84AFAD62352E}"/>
+              </a:ext>
+            </a:extLst>
+          </p:cNvPr>
           <p:cNvSpPr/>
           <p:nvPr/>
         </p:nvSpPr>
@@ -5582,7 +5655,13 @@
       </p:sp>
       <p:sp>
         <p:nvSpPr>
-          <p:cNvPr id="31" name="テキスト ボックス 30"/>
+          <p:cNvPr id="31" name="テキスト ボックス 30">
+            <a:extLst>
+              <a:ext uri="{FF2B5EF4-FFF2-40B4-BE49-F238E27FC236}">
+                <a16:creationId xmlns:a16="http://schemas.microsoft.com/office/drawing/2014/main" id="{12D14887-2B5F-0615-ACDB-D00EE5BF8A2D}"/>
+              </a:ext>
+            </a:extLst>
+          </p:cNvPr>
           <p:cNvSpPr txBox="1"/>
           <p:nvPr/>
         </p:nvSpPr>
@@ -5603,30 +5682,30 @@
           <a:lstStyle/>
           <a:p>
             <a:r>
-              <a:rPr kumimoji="1" lang="en-US" altLang="ja-JP" b="1" dirty="0" smtClean="0"/>
+              <a:rPr kumimoji="1" lang="en-US" altLang="ja-JP" b="1" dirty="0"/>
               <a:t>※VW</a:t>
             </a:r>
             <a:r>
-              <a:rPr lang="ja-JP" altLang="en-US" b="1" dirty="0" smtClean="0"/>
+              <a:rPr lang="ja-JP" altLang="en-US" b="1" dirty="0"/>
               <a:t>・・・横幅</a:t>
             </a:r>
             <a:r>
-              <a:rPr lang="en-US" altLang="ja-JP" b="1" dirty="0" smtClean="0"/>
+              <a:rPr lang="en-US" altLang="ja-JP" b="1" dirty="0"/>
               <a:t>(</a:t>
             </a:r>
             <a:r>
-              <a:rPr lang="ja-JP" altLang="en-US" b="1" dirty="0" smtClean="0"/>
+              <a:rPr lang="ja-JP" altLang="en-US" b="1" dirty="0"/>
               <a:t>半分</a:t>
             </a:r>
             <a:r>
-              <a:rPr lang="en-US" altLang="ja-JP" b="1" dirty="0" smtClean="0"/>
+              <a:rPr lang="en-US" altLang="ja-JP" b="1" dirty="0"/>
               <a:t>)</a:t>
             </a:r>
             <a:r>
-              <a:rPr lang="ja-JP" altLang="en-US" b="1" dirty="0" smtClean="0"/>
+              <a:rPr lang="ja-JP" altLang="en-US" b="1" dirty="0"/>
               <a:t>のベクトル</a:t>
             </a:r>
-            <a:endParaRPr lang="en-US" altLang="ja-JP" b="1" dirty="0" smtClean="0"/>
+            <a:endParaRPr lang="en-US" altLang="ja-JP" b="1" dirty="0"/>
           </a:p>
           <a:p>
             <a:r>
@@ -5634,37 +5713,36 @@
               <a:t>　</a:t>
             </a:r>
             <a:r>
-              <a:rPr kumimoji="1" lang="en-US" altLang="ja-JP" b="1" dirty="0" smtClean="0"/>
+              <a:rPr kumimoji="1" lang="en-US" altLang="ja-JP" b="1" dirty="0"/>
               <a:t>VH</a:t>
             </a:r>
             <a:r>
-              <a:rPr kumimoji="1" lang="ja-JP" altLang="en-US" b="1" dirty="0" smtClean="0"/>
+              <a:rPr kumimoji="1" lang="ja-JP" altLang="en-US" b="1" dirty="0"/>
               <a:t>・・・縦幅</a:t>
             </a:r>
             <a:r>
-              <a:rPr kumimoji="1" lang="en-US" altLang="ja-JP" b="1" dirty="0" smtClean="0"/>
+              <a:rPr kumimoji="1" lang="en-US" altLang="ja-JP" b="1" dirty="0"/>
               <a:t>(</a:t>
             </a:r>
             <a:r>
-              <a:rPr kumimoji="1" lang="ja-JP" altLang="en-US" b="1" dirty="0" smtClean="0"/>
+              <a:rPr kumimoji="1" lang="ja-JP" altLang="en-US" b="1" dirty="0"/>
               <a:t>半分</a:t>
             </a:r>
             <a:r>
-              <a:rPr kumimoji="1" lang="en-US" altLang="ja-JP" b="1" dirty="0" smtClean="0"/>
+              <a:rPr kumimoji="1" lang="en-US" altLang="ja-JP" b="1" dirty="0"/>
               <a:t>)</a:t>
             </a:r>
             <a:r>
-              <a:rPr kumimoji="1" lang="ja-JP" altLang="en-US" b="1" dirty="0" smtClean="0"/>
+              <a:rPr kumimoji="1" lang="ja-JP" altLang="en-US" b="1" dirty="0"/>
               <a:t>のベクトル</a:t>
             </a:r>
-            <a:endParaRPr kumimoji="1" lang="ja-JP" altLang="en-US" b="1" dirty="0"/>
           </a:p>
         </p:txBody>
       </p:sp>
     </p:spTree>
     <p:extLst>
       <p:ext uri="{BB962C8B-B14F-4D97-AF65-F5344CB8AC3E}">
-        <p14:creationId xmlns:p14="http://schemas.microsoft.com/office/powerpoint/2010/main" val="2705282904"/>
+        <p14:creationId xmlns:p14="http://schemas.microsoft.com/office/powerpoint/2010/main" val="2760097806"/>
       </p:ext>
     </p:extLst>
   </p:cSld>
